--- a/tutor-time/revision-that-survives-the-week/downloads/Revision_That_Survives_the_Week.pptx
+++ b/tutor-time/revision-that-survives-the-week/downloads/Revision_That_Survives_the_Week.pptx
@@ -9651,7 +9651,7 @@
                 </a:solidFill>
                 <a:latin typeface="Karla"/>
               </a:rPr>
-              <a:t>A two-minute check-in for registration on the Mondays that follow.</a:t>
+              <a:t>A two-minute check-in at registration.</a:t>
             </a:r>
           </a:p>
         </p:txBody>
@@ -14636,7 +14636,7 @@
                 </a:solidFill>
                 <a:latin typeface="Karla"/>
               </a:rPr>
-              <a:t>Three hours, one word. By half past six it is something else.</a:t>
+              <a:t>Three hours, no detail. By half past six it is something else.</a:t>
             </a:r>
           </a:p>
         </p:txBody>

--- a/tutor-time/revision-that-survives-the-week/downloads/Revision_That_Survives_the_Week.pptx
+++ b/tutor-time/revision-that-survives-the-week/downloads/Revision_That_Survives_the_Week.pptx
@@ -3203,11 +3203,11 @@
               </a:spcAft>
             </a:pPr>
             <a:r>
-              <a:rPr sz="3600" b="1" i="0">
+              <a:rPr sz="3600" b="0" i="0">
                 <a:solidFill>
                   <a:srgbClr val="2E3570"/>
                 </a:solidFill>
-                <a:latin typeface="Libre Caslon Display"/>
+                <a:latin typeface="Georgia"/>
               </a:rPr>
               <a:t>Revision That</a:t>
             </a:r>
@@ -3215,11 +3215,11 @@
               <a:rPr lang="en-GB"/>
             </a:br>
             <a:r>
-              <a:rPr sz="3600" b="1" i="0">
+              <a:rPr sz="3600" b="0" i="0">
                 <a:solidFill>
                   <a:srgbClr val="2E3570"/>
                 </a:solidFill>
-                <a:latin typeface="Libre Caslon Display"/>
+                <a:latin typeface="Georgia"/>
               </a:rPr>
               <a:t>Survives the Week</a:t>
             </a:r>
@@ -3305,7 +3305,7 @@
                 <a:solidFill>
                   <a:srgbClr val="5C6552"/>
                 </a:solidFill>
-                <a:latin typeface="Karla"/>
+                <a:latin typeface="Calibri"/>
               </a:rPr>
               <a:t>A plan is only as good as the week it meets.</a:t>
             </a:r>
@@ -3347,7 +3347,7 @@
                 <a:solidFill>
                   <a:srgbClr val="8B9179"/>
                 </a:solidFill>
-                <a:latin typeface="Karla"/>
+                <a:latin typeface="Calibri"/>
               </a:rPr>
               <a:t>Tutor Time  ·  a lesson for Year 10 to 13</a:t>
             </a:r>
@@ -3413,7 +3413,7 @@
                 <a:solidFill>
                   <a:srgbClr val="8B9179"/>
                 </a:solidFill>
-                <a:latin typeface="Karla"/>
+                <a:latin typeface="Calibri"/>
               </a:rPr>
               <a:t>The Pastoral Guide</a:t>
             </a:r>
@@ -3455,7 +3455,7 @@
                 <a:solidFill>
                   <a:srgbClr val="8B9179"/>
                 </a:solidFill>
-                <a:latin typeface="Karla"/>
+                <a:latin typeface="Calibri"/>
               </a:rPr>
               <a:t>1 / 17</a:t>
             </a:r>
@@ -3526,18 +3526,102 @@
       </p:sp>
       <p:sp>
         <p:nvSpPr>
-          <p:cNvPr id="3" name="Rounded Rectangle 2"/>
+          <p:cNvPr id="4" name="TextBox 3"/>
+          <p:cNvSpPr txBox="1"/>
+          <p:nvPr/>
+        </p:nvSpPr>
+        <p:spPr>
+          <a:xfrm>
+            <a:off x="685800" y="896112"/>
+            <a:ext cx="7772400" cy="566928"/>
+          </a:xfrm>
+          <a:prstGeom prst="rect">
+            <a:avLst/>
+          </a:prstGeom>
+          <a:noFill/>
+        </p:spPr>
+        <p:txBody>
+          <a:bodyPr wrap="square" anchor="t" lIns="0" rIns="0" tIns="0" bIns="0">
+            <a:spAutoFit/>
+          </a:bodyPr>
+          <a:lstStyle/>
+          <a:p>
+            <a:pPr algn="l">
+              <a:lnSpc>
+                <a:spcPct val="105000"/>
+              </a:lnSpc>
+              <a:spcAft>
+                <a:spcPts val="0"/>
+              </a:spcAft>
+            </a:pPr>
+            <a:r>
+              <a:rPr sz="3000" b="0" i="0">
+                <a:solidFill>
+                  <a:srgbClr val="FFFDF7"/>
+                </a:solidFill>
+                <a:latin typeface="Georgia"/>
+              </a:rPr>
+              <a:t>Thursday, four o’clock</a:t>
+            </a:r>
+          </a:p>
+        </p:txBody>
+      </p:sp>
+      <p:sp>
+        <p:nvSpPr>
+          <p:cNvPr id="5" name="TextBox 4"/>
+          <p:cNvSpPr txBox="1"/>
+          <p:nvPr/>
+        </p:nvSpPr>
+        <p:spPr>
+          <a:xfrm>
+            <a:off x="685800" y="1645920"/>
+            <a:ext cx="7772400" cy="1097280"/>
+          </a:xfrm>
+          <a:prstGeom prst="rect">
+            <a:avLst/>
+          </a:prstGeom>
+          <a:noFill/>
+        </p:spPr>
+        <p:txBody>
+          <a:bodyPr wrap="square" anchor="t" lIns="0" rIns="0" tIns="0" bIns="0">
+            <a:spAutoFit/>
+          </a:bodyPr>
+          <a:lstStyle/>
+          <a:p>
+            <a:pPr algn="l">
+              <a:lnSpc>
+                <a:spcPct val="135000"/>
+              </a:lnSpc>
+              <a:spcAft>
+                <a:spcPts val="0"/>
+              </a:spcAft>
+            </a:pPr>
+            <a:r>
+              <a:rPr sz="1600" b="0" i="0">
+                <a:solidFill>
+                  <a:srgbClr val="FFFDF7"/>
+                </a:solidFill>
+                <a:latin typeface="Calibri"/>
+              </a:rPr>
+              <a:t>A message at lunchtime. You are needed from four until nine on Thursday, and it is not up to you. Maybe it is a shift that moved, maybe it is looking after someone, maybe it is a lift you cannot say no to.</a:t>
+            </a:r>
+          </a:p>
+        </p:txBody>
+      </p:sp>
+      <p:sp>
+        <p:nvSpPr>
+          <p:cNvPr id="6" name="Rounded Rectangle 5"/>
           <p:cNvSpPr/>
           <p:nvPr/>
         </p:nvSpPr>
         <p:spPr>
           <a:xfrm>
-            <a:off x="685800" y="548640"/>
-            <a:ext cx="1095269" cy="237744"/>
+            <a:off x="685800" y="2944368"/>
+            <a:ext cx="7772400" cy="658368"/>
           </a:xfrm>
           <a:prstGeom prst="roundRect">
             <a:avLst>
-              <a:gd name="adj" fmla="val 50000"/>
+              <a:gd name="adj" fmla="val 8000"/>
             </a:avLst>
           </a:prstGeom>
           <a:solidFill>
@@ -3563,145 +3647,6 @@
           </a:fontRef>
         </p:style>
         <p:txBody>
-          <a:bodyPr rtlCol="0" anchor="ctr" wrap="none" lIns="0" rIns="0" tIns="0" bIns="0"/>
-          <a:lstStyle/>
-          <a:p>
-            <a:pPr algn="ctr"/>
-            <a:r>
-              <a:rPr sz="950" b="1" spc="90">
-                <a:solidFill>
-                  <a:srgbClr val="2E3570"/>
-                </a:solidFill>
-                <a:latin typeface="Karla"/>
-              </a:rPr>
-              <a:t>IT BREAKS</a:t>
-            </a:r>
-          </a:p>
-        </p:txBody>
-      </p:sp>
-      <p:sp>
-        <p:nvSpPr>
-          <p:cNvPr id="4" name="TextBox 3"/>
-          <p:cNvSpPr txBox="1"/>
-          <p:nvPr/>
-        </p:nvSpPr>
-        <p:spPr>
-          <a:xfrm>
-            <a:off x="685800" y="896112"/>
-            <a:ext cx="7772400" cy="566928"/>
-          </a:xfrm>
-          <a:prstGeom prst="rect">
-            <a:avLst/>
-          </a:prstGeom>
-          <a:noFill/>
-        </p:spPr>
-        <p:txBody>
-          <a:bodyPr wrap="square" anchor="t" lIns="0" rIns="0" tIns="0" bIns="0">
-            <a:spAutoFit/>
-          </a:bodyPr>
-          <a:lstStyle/>
-          <a:p>
-            <a:pPr algn="l">
-              <a:lnSpc>
-                <a:spcPct val="105000"/>
-              </a:lnSpc>
-              <a:spcAft>
-                <a:spcPts val="0"/>
-              </a:spcAft>
-            </a:pPr>
-            <a:r>
-              <a:rPr sz="3000" b="1" i="0">
-                <a:solidFill>
-                  <a:srgbClr val="FFFDF7"/>
-                </a:solidFill>
-                <a:latin typeface="Libre Caslon Display"/>
-              </a:rPr>
-              <a:t>Thursday, four o’clock</a:t>
-            </a:r>
-          </a:p>
-        </p:txBody>
-      </p:sp>
-      <p:sp>
-        <p:nvSpPr>
-          <p:cNvPr id="5" name="TextBox 4"/>
-          <p:cNvSpPr txBox="1"/>
-          <p:nvPr/>
-        </p:nvSpPr>
-        <p:spPr>
-          <a:xfrm>
-            <a:off x="685800" y="1645920"/>
-            <a:ext cx="7772400" cy="1097280"/>
-          </a:xfrm>
-          <a:prstGeom prst="rect">
-            <a:avLst/>
-          </a:prstGeom>
-          <a:noFill/>
-        </p:spPr>
-        <p:txBody>
-          <a:bodyPr wrap="square" anchor="t" lIns="0" rIns="0" tIns="0" bIns="0">
-            <a:spAutoFit/>
-          </a:bodyPr>
-          <a:lstStyle/>
-          <a:p>
-            <a:pPr algn="l">
-              <a:lnSpc>
-                <a:spcPct val="135000"/>
-              </a:lnSpc>
-              <a:spcAft>
-                <a:spcPts val="0"/>
-              </a:spcAft>
-            </a:pPr>
-            <a:r>
-              <a:rPr sz="1600" b="0" i="0">
-                <a:solidFill>
-                  <a:srgbClr val="FFFDF7"/>
-                </a:solidFill>
-                <a:latin typeface="Karla"/>
-              </a:rPr>
-              <a:t>A message at lunchtime. You are needed from four until nine on Thursday, and it is not up to you. Maybe it is a shift that moved, maybe it is looking after someone, maybe it is a lift you cannot say no to.</a:t>
-            </a:r>
-          </a:p>
-        </p:txBody>
-      </p:sp>
-      <p:sp>
-        <p:nvSpPr>
-          <p:cNvPr id="6" name="Rounded Rectangle 5"/>
-          <p:cNvSpPr/>
-          <p:nvPr/>
-        </p:nvSpPr>
-        <p:spPr>
-          <a:xfrm>
-            <a:off x="685800" y="2944368"/>
-            <a:ext cx="7772400" cy="658368"/>
-          </a:xfrm>
-          <a:prstGeom prst="roundRect">
-            <a:avLst>
-              <a:gd name="adj" fmla="val 8000"/>
-            </a:avLst>
-          </a:prstGeom>
-          <a:solidFill>
-            <a:srgbClr val="C9CCE6"/>
-          </a:solidFill>
-          <a:ln>
-            <a:noFill/>
-          </a:ln>
-          <a:effectLst/>
-        </p:spPr>
-        <p:style>
-          <a:lnRef idx="1">
-            <a:schemeClr val="accent1"/>
-          </a:lnRef>
-          <a:fillRef idx="3">
-            <a:schemeClr val="accent1"/>
-          </a:fillRef>
-          <a:effectRef idx="2">
-            <a:schemeClr val="accent1"/>
-          </a:effectRef>
-          <a:fontRef idx="minor">
-            <a:schemeClr val="lt1"/>
-          </a:fontRef>
-        </p:style>
-        <p:txBody>
           <a:bodyPr rtlCol="0" anchor="ctr"/>
           <a:lstStyle/>
           <a:p>
@@ -3744,7 +3689,7 @@
                 <a:solidFill>
                   <a:srgbClr val="2E3570"/>
                 </a:solidFill>
-                <a:latin typeface="Karla"/>
+                <a:latin typeface="Calibri"/>
               </a:rPr>
               <a:t>Thursday is gone. Repair the plan again.</a:t>
             </a:r>
@@ -3786,7 +3731,7 @@
                 <a:solidFill>
                   <a:srgbClr val="C9CCE6"/>
                 </a:solidFill>
-                <a:latin typeface="Karla"/>
+                <a:latin typeface="Calibri"/>
               </a:rPr>
               <a:t>Two minutes. If the spare slot is already used, something has to be cut. Decide what, and say why.</a:t>
             </a:r>
@@ -3852,7 +3797,7 @@
                 <a:solidFill>
                   <a:srgbClr val="C9CCE6"/>
                 </a:solidFill>
-                <a:latin typeface="Karla"/>
+                <a:latin typeface="Calibri"/>
               </a:rPr>
               <a:t>The Pastoral Guide</a:t>
             </a:r>
@@ -3894,7 +3839,7 @@
                 <a:solidFill>
                   <a:srgbClr val="C9CCE6"/>
                 </a:solidFill>
-                <a:latin typeface="Karla"/>
+                <a:latin typeface="Calibri"/>
               </a:rPr>
               <a:t>10 / 17</a:t>
             </a:r>
@@ -3965,18 +3910,102 @@
       </p:sp>
       <p:sp>
         <p:nvSpPr>
-          <p:cNvPr id="3" name="Rounded Rectangle 2"/>
+          <p:cNvPr id="4" name="TextBox 3"/>
+          <p:cNvSpPr txBox="1"/>
+          <p:nvPr/>
+        </p:nvSpPr>
+        <p:spPr>
+          <a:xfrm>
+            <a:off x="685800" y="896112"/>
+            <a:ext cx="7772400" cy="566928"/>
+          </a:xfrm>
+          <a:prstGeom prst="rect">
+            <a:avLst/>
+          </a:prstGeom>
+          <a:noFill/>
+        </p:spPr>
+        <p:txBody>
+          <a:bodyPr wrap="square" anchor="t" lIns="0" rIns="0" tIns="0" bIns="0">
+            <a:spAutoFit/>
+          </a:bodyPr>
+          <a:lstStyle/>
+          <a:p>
+            <a:pPr algn="l">
+              <a:lnSpc>
+                <a:spcPct val="105000"/>
+              </a:lnSpc>
+              <a:spcAft>
+                <a:spcPts val="0"/>
+              </a:spcAft>
+            </a:pPr>
+            <a:r>
+              <a:rPr sz="3000" b="0" i="0">
+                <a:solidFill>
+                  <a:srgbClr val="FFFDF7"/>
+                </a:solidFill>
+                <a:latin typeface="Georgia"/>
+              </a:rPr>
+              <a:t>Saturday, two o’clock</a:t>
+            </a:r>
+          </a:p>
+        </p:txBody>
+      </p:sp>
+      <p:sp>
+        <p:nvSpPr>
+          <p:cNvPr id="5" name="TextBox 4"/>
+          <p:cNvSpPr txBox="1"/>
+          <p:nvPr/>
+        </p:nvSpPr>
+        <p:spPr>
+          <a:xfrm>
+            <a:off x="685800" y="1645920"/>
+            <a:ext cx="7772400" cy="548640"/>
+          </a:xfrm>
+          <a:prstGeom prst="rect">
+            <a:avLst/>
+          </a:prstGeom>
+          <a:noFill/>
+        </p:spPr>
+        <p:txBody>
+          <a:bodyPr wrap="square" anchor="t" lIns="0" rIns="0" tIns="0" bIns="0">
+            <a:spAutoFit/>
+          </a:bodyPr>
+          <a:lstStyle/>
+          <a:p>
+            <a:pPr algn="l">
+              <a:lnSpc>
+                <a:spcPct val="135000"/>
+              </a:lnSpc>
+              <a:spcAft>
+                <a:spcPts val="0"/>
+              </a:spcAft>
+            </a:pPr>
+            <a:r>
+              <a:rPr sz="1600" b="0" i="0">
+                <a:solidFill>
+                  <a:srgbClr val="FFFDF7"/>
+                </a:solidFill>
+                <a:latin typeface="Calibri"/>
+              </a:rPr>
+              <a:t>A friend messages. They are not okay, and they ask whether you can come over this afternoon. You know that you are going.</a:t>
+            </a:r>
+          </a:p>
+        </p:txBody>
+      </p:sp>
+      <p:sp>
+        <p:nvSpPr>
+          <p:cNvPr id="6" name="Rounded Rectangle 5"/>
           <p:cNvSpPr/>
           <p:nvPr/>
         </p:nvSpPr>
         <p:spPr>
           <a:xfrm>
-            <a:off x="685800" y="548640"/>
-            <a:ext cx="1095269" cy="237744"/>
+            <a:off x="685800" y="2395728"/>
+            <a:ext cx="7772400" cy="658368"/>
           </a:xfrm>
           <a:prstGeom prst="roundRect">
             <a:avLst>
-              <a:gd name="adj" fmla="val 50000"/>
+              <a:gd name="adj" fmla="val 8000"/>
             </a:avLst>
           </a:prstGeom>
           <a:solidFill>
@@ -4002,145 +4031,6 @@
           </a:fontRef>
         </p:style>
         <p:txBody>
-          <a:bodyPr rtlCol="0" anchor="ctr" wrap="none" lIns="0" rIns="0" tIns="0" bIns="0"/>
-          <a:lstStyle/>
-          <a:p>
-            <a:pPr algn="ctr"/>
-            <a:r>
-              <a:rPr sz="950" b="1" spc="90">
-                <a:solidFill>
-                  <a:srgbClr val="2E3570"/>
-                </a:solidFill>
-                <a:latin typeface="Karla"/>
-              </a:rPr>
-              <a:t>IT BREAKS</a:t>
-            </a:r>
-          </a:p>
-        </p:txBody>
-      </p:sp>
-      <p:sp>
-        <p:nvSpPr>
-          <p:cNvPr id="4" name="TextBox 3"/>
-          <p:cNvSpPr txBox="1"/>
-          <p:nvPr/>
-        </p:nvSpPr>
-        <p:spPr>
-          <a:xfrm>
-            <a:off x="685800" y="896112"/>
-            <a:ext cx="7772400" cy="566928"/>
-          </a:xfrm>
-          <a:prstGeom prst="rect">
-            <a:avLst/>
-          </a:prstGeom>
-          <a:noFill/>
-        </p:spPr>
-        <p:txBody>
-          <a:bodyPr wrap="square" anchor="t" lIns="0" rIns="0" tIns="0" bIns="0">
-            <a:spAutoFit/>
-          </a:bodyPr>
-          <a:lstStyle/>
-          <a:p>
-            <a:pPr algn="l">
-              <a:lnSpc>
-                <a:spcPct val="105000"/>
-              </a:lnSpc>
-              <a:spcAft>
-                <a:spcPts val="0"/>
-              </a:spcAft>
-            </a:pPr>
-            <a:r>
-              <a:rPr sz="3000" b="1" i="0">
-                <a:solidFill>
-                  <a:srgbClr val="FFFDF7"/>
-                </a:solidFill>
-                <a:latin typeface="Libre Caslon Display"/>
-              </a:rPr>
-              <a:t>Saturday, two o’clock</a:t>
-            </a:r>
-          </a:p>
-        </p:txBody>
-      </p:sp>
-      <p:sp>
-        <p:nvSpPr>
-          <p:cNvPr id="5" name="TextBox 4"/>
-          <p:cNvSpPr txBox="1"/>
-          <p:nvPr/>
-        </p:nvSpPr>
-        <p:spPr>
-          <a:xfrm>
-            <a:off x="685800" y="1645920"/>
-            <a:ext cx="7772400" cy="548640"/>
-          </a:xfrm>
-          <a:prstGeom prst="rect">
-            <a:avLst/>
-          </a:prstGeom>
-          <a:noFill/>
-        </p:spPr>
-        <p:txBody>
-          <a:bodyPr wrap="square" anchor="t" lIns="0" rIns="0" tIns="0" bIns="0">
-            <a:spAutoFit/>
-          </a:bodyPr>
-          <a:lstStyle/>
-          <a:p>
-            <a:pPr algn="l">
-              <a:lnSpc>
-                <a:spcPct val="135000"/>
-              </a:lnSpc>
-              <a:spcAft>
-                <a:spcPts val="0"/>
-              </a:spcAft>
-            </a:pPr>
-            <a:r>
-              <a:rPr sz="1600" b="0" i="0">
-                <a:solidFill>
-                  <a:srgbClr val="FFFDF7"/>
-                </a:solidFill>
-                <a:latin typeface="Karla"/>
-              </a:rPr>
-              <a:t>A friend messages. They are not okay, and they ask whether you can come over this afternoon. You know that you are going.</a:t>
-            </a:r>
-          </a:p>
-        </p:txBody>
-      </p:sp>
-      <p:sp>
-        <p:nvSpPr>
-          <p:cNvPr id="6" name="Rounded Rectangle 5"/>
-          <p:cNvSpPr/>
-          <p:nvPr/>
-        </p:nvSpPr>
-        <p:spPr>
-          <a:xfrm>
-            <a:off x="685800" y="2395728"/>
-            <a:ext cx="7772400" cy="658368"/>
-          </a:xfrm>
-          <a:prstGeom prst="roundRect">
-            <a:avLst>
-              <a:gd name="adj" fmla="val 8000"/>
-            </a:avLst>
-          </a:prstGeom>
-          <a:solidFill>
-            <a:srgbClr val="C9CCE6"/>
-          </a:solidFill>
-          <a:ln>
-            <a:noFill/>
-          </a:ln>
-          <a:effectLst/>
-        </p:spPr>
-        <p:style>
-          <a:lnRef idx="1">
-            <a:schemeClr val="accent1"/>
-          </a:lnRef>
-          <a:fillRef idx="3">
-            <a:schemeClr val="accent1"/>
-          </a:fillRef>
-          <a:effectRef idx="2">
-            <a:schemeClr val="accent1"/>
-          </a:effectRef>
-          <a:fontRef idx="minor">
-            <a:schemeClr val="lt1"/>
-          </a:fontRef>
-        </p:style>
-        <p:txBody>
           <a:bodyPr rtlCol="0" anchor="ctr"/>
           <a:lstStyle/>
           <a:p>
@@ -4183,7 +4073,7 @@
                 <a:solidFill>
                   <a:srgbClr val="2E3570"/>
                 </a:solidFill>
-                <a:latin typeface="Karla"/>
+                <a:latin typeface="Calibri"/>
               </a:rPr>
               <a:t>Saturday afternoon is theirs. Repair the plan one last time.</a:t>
             </a:r>
@@ -4225,7 +4115,7 @@
                 <a:solidFill>
                   <a:srgbClr val="C9CCE6"/>
                 </a:solidFill>
-                <a:latin typeface="Karla"/>
+                <a:latin typeface="Calibri"/>
               </a:rPr>
               <a:t>Two minutes. Notice which sessions have moved three times and are still on the sheet.</a:t>
             </a:r>
@@ -4291,7 +4181,7 @@
                 <a:solidFill>
                   <a:srgbClr val="C9CCE6"/>
                 </a:solidFill>
-                <a:latin typeface="Karla"/>
+                <a:latin typeface="Calibri"/>
               </a:rPr>
               <a:t>The Pastoral Guide</a:t>
             </a:r>
@@ -4333,7 +4223,7 @@
                 <a:solidFill>
                   <a:srgbClr val="C9CCE6"/>
                 </a:solidFill>
-                <a:latin typeface="Karla"/>
+                <a:latin typeface="Calibri"/>
               </a:rPr>
               <a:t>11 / 17</a:t>
             </a:r>
@@ -4404,61 +4294,6 @@
       </p:sp>
       <p:sp>
         <p:nvSpPr>
-          <p:cNvPr id="3" name="Rounded Rectangle 2"/>
-          <p:cNvSpPr/>
-          <p:nvPr/>
-        </p:nvSpPr>
-        <p:spPr>
-          <a:xfrm>
-            <a:off x="685800" y="548640"/>
-            <a:ext cx="1165565" cy="237744"/>
-          </a:xfrm>
-          <a:prstGeom prst="roundRect">
-            <a:avLst>
-              <a:gd name="adj" fmla="val 50000"/>
-            </a:avLst>
-          </a:prstGeom>
-          <a:solidFill>
-            <a:srgbClr val="EEEFF7"/>
-          </a:solidFill>
-          <a:ln>
-            <a:noFill/>
-          </a:ln>
-          <a:effectLst/>
-        </p:spPr>
-        <p:style>
-          <a:lnRef idx="1">
-            <a:schemeClr val="accent1"/>
-          </a:lnRef>
-          <a:fillRef idx="3">
-            <a:schemeClr val="accent1"/>
-          </a:fillRef>
-          <a:effectRef idx="2">
-            <a:schemeClr val="accent1"/>
-          </a:effectRef>
-          <a:fontRef idx="minor">
-            <a:schemeClr val="lt1"/>
-          </a:fontRef>
-        </p:style>
-        <p:txBody>
-          <a:bodyPr rtlCol="0" anchor="ctr" wrap="none" lIns="0" rIns="0" tIns="0" bIns="0"/>
-          <a:lstStyle/>
-          <a:p>
-            <a:pPr algn="ctr"/>
-            <a:r>
-              <a:rPr sz="950" b="1" spc="90">
-                <a:solidFill>
-                  <a:srgbClr val="2E3570"/>
-                </a:solidFill>
-                <a:latin typeface="Karla"/>
-              </a:rPr>
-              <a:t>LOOK BACK</a:t>
-            </a:r>
-          </a:p>
-        </p:txBody>
-      </p:sp>
-      <p:sp>
-        <p:nvSpPr>
           <p:cNvPr id="4" name="TextBox 3"/>
           <p:cNvSpPr txBox="1"/>
           <p:nvPr/>
@@ -4488,11 +4323,11 @@
               </a:spcAft>
             </a:pPr>
             <a:r>
-              <a:rPr sz="3000" b="1" i="0">
+              <a:rPr sz="3000" b="0" i="0">
                 <a:solidFill>
                   <a:srgbClr val="2E3436"/>
                 </a:solidFill>
-                <a:latin typeface="Libre Caslon Display"/>
+                <a:latin typeface="Georgia"/>
               </a:rPr>
               <a:t>What survived</a:t>
             </a:r>
@@ -4534,7 +4369,7 @@
                 <a:solidFill>
                   <a:srgbClr val="5C6552"/>
                 </a:solidFill>
-                <a:latin typeface="Karla"/>
+                <a:latin typeface="Calibri"/>
               </a:rPr>
               <a:t>Look at the sheet. Some sessions moved three times and are still there.</a:t>
             </a:r>
@@ -4664,7 +4499,7 @@
                 <a:solidFill>
                   <a:srgbClr val="FFFDF7"/>
                 </a:solidFill>
-                <a:latin typeface="Karla"/>
+                <a:latin typeface="Calibri"/>
               </a:rPr>
               <a:t>1</a:t>
             </a:r>
@@ -4702,11 +4537,11 @@
               </a:spcAft>
             </a:pPr>
             <a:r>
-              <a:rPr sz="1300" b="1" i="0">
+              <a:rPr sz="1300" b="0" i="0">
                 <a:solidFill>
                   <a:srgbClr val="2E3570"/>
                 </a:solidFill>
-                <a:latin typeface="Libre Caslon Display"/>
+                <a:latin typeface="Georgia"/>
               </a:rPr>
               <a:t>The ones that survived were small</a:t>
             </a:r>
@@ -4748,7 +4583,7 @@
                 <a:solidFill>
                   <a:srgbClr val="5C6552"/>
                 </a:solidFill>
-                <a:latin typeface="Karla"/>
+                <a:latin typeface="Calibri"/>
               </a:rPr>
               <a:t>Twenty-five minutes can move to a Sunday morning. Three hours cannot.</a:t>
             </a:r>
@@ -4878,7 +4713,7 @@
                 <a:solidFill>
                   <a:srgbClr val="FFFDF7"/>
                 </a:solidFill>
-                <a:latin typeface="Karla"/>
+                <a:latin typeface="Calibri"/>
               </a:rPr>
               <a:t>2</a:t>
             </a:r>
@@ -4916,11 +4751,11 @@
               </a:spcAft>
             </a:pPr>
             <a:r>
-              <a:rPr sz="1300" b="1" i="0">
+              <a:rPr sz="1300" b="0" i="0">
                 <a:solidFill>
                   <a:srgbClr val="2E3570"/>
                 </a:solidFill>
-                <a:latin typeface="Libre Caslon Display"/>
+                <a:latin typeface="Georgia"/>
               </a:rPr>
               <a:t>The ones that survived were named</a:t>
             </a:r>
@@ -4962,7 +4797,7 @@
                 <a:solidFill>
                   <a:srgbClr val="5C6552"/>
                 </a:solidFill>
-                <a:latin typeface="Karla"/>
+                <a:latin typeface="Calibri"/>
               </a:rPr>
               <a:t>You knew what “quadratics, page 42” was, so you could move it without losing it.</a:t>
             </a:r>
@@ -5092,7 +4927,7 @@
                 <a:solidFill>
                   <a:srgbClr val="FFFDF7"/>
                 </a:solidFill>
-                <a:latin typeface="Karla"/>
+                <a:latin typeface="Calibri"/>
               </a:rPr>
               <a:t>3</a:t>
             </a:r>
@@ -5130,11 +4965,11 @@
               </a:spcAft>
             </a:pPr>
             <a:r>
-              <a:rPr sz="1300" b="1" i="0">
+              <a:rPr sz="1300" b="0" i="0">
                 <a:solidFill>
                   <a:srgbClr val="2E3570"/>
                 </a:solidFill>
-                <a:latin typeface="Libre Caslon Display"/>
+                <a:latin typeface="Georgia"/>
               </a:rPr>
               <a:t>The spare slot did most of the work</a:t>
             </a:r>
@@ -5176,7 +5011,7 @@
                 <a:solidFill>
                   <a:srgbClr val="5C6552"/>
                 </a:solidFill>
-                <a:latin typeface="Karla"/>
+                <a:latin typeface="Calibri"/>
               </a:rPr>
               <a:t>Without it, the first interruption would have finished the plan.</a:t>
             </a:r>
@@ -5218,7 +5053,7 @@
                 <a:solidFill>
                   <a:srgbClr val="5C6552"/>
                 </a:solidFill>
-                <a:latin typeface="Karla"/>
+                <a:latin typeface="Calibri"/>
               </a:rPr>
               <a:t>Tell the person next to you which session you would have lost without the spare slot.</a:t>
             </a:r>
@@ -5284,7 +5119,7 @@
                 <a:solidFill>
                   <a:srgbClr val="8B9179"/>
                 </a:solidFill>
-                <a:latin typeface="Karla"/>
+                <a:latin typeface="Calibri"/>
               </a:rPr>
               <a:t>The Pastoral Guide</a:t>
             </a:r>
@@ -5326,7 +5161,7 @@
                 <a:solidFill>
                   <a:srgbClr val="8B9179"/>
                 </a:solidFill>
-                <a:latin typeface="Karla"/>
+                <a:latin typeface="Calibri"/>
               </a:rPr>
               <a:t>12 / 17</a:t>
             </a:r>
@@ -5397,61 +5232,6 @@
       </p:sp>
       <p:sp>
         <p:nvSpPr>
-          <p:cNvPr id="3" name="Rounded Rectangle 2"/>
-          <p:cNvSpPr/>
-          <p:nvPr/>
-        </p:nvSpPr>
-        <p:spPr>
-          <a:xfrm>
-            <a:off x="685800" y="548640"/>
-            <a:ext cx="740193" cy="237744"/>
-          </a:xfrm>
-          <a:prstGeom prst="roundRect">
-            <a:avLst>
-              <a:gd name="adj" fmla="val 50000"/>
-            </a:avLst>
-          </a:prstGeom>
-          <a:solidFill>
-            <a:srgbClr val="EEEFF7"/>
-          </a:solidFill>
-          <a:ln>
-            <a:noFill/>
-          </a:ln>
-          <a:effectLst/>
-        </p:spPr>
-        <p:style>
-          <a:lnRef idx="1">
-            <a:schemeClr val="accent1"/>
-          </a:lnRef>
-          <a:fillRef idx="3">
-            <a:schemeClr val="accent1"/>
-          </a:fillRef>
-          <a:effectRef idx="2">
-            <a:schemeClr val="accent1"/>
-          </a:effectRef>
-          <a:fontRef idx="minor">
-            <a:schemeClr val="lt1"/>
-          </a:fontRef>
-        </p:style>
-        <p:txBody>
-          <a:bodyPr rtlCol="0" anchor="ctr" wrap="none" lIns="0" rIns="0" tIns="0" bIns="0"/>
-          <a:lstStyle/>
-          <a:p>
-            <a:pPr algn="ctr"/>
-            <a:r>
-              <a:rPr sz="950" b="1" spc="90">
-                <a:solidFill>
-                  <a:srgbClr val="2E3570"/>
-                </a:solidFill>
-                <a:latin typeface="Karla"/>
-              </a:rPr>
-              <a:t>SWAP</a:t>
-            </a:r>
-          </a:p>
-        </p:txBody>
-      </p:sp>
-      <p:sp>
-        <p:nvSpPr>
           <p:cNvPr id="4" name="TextBox 3"/>
           <p:cNvSpPr txBox="1"/>
           <p:nvPr/>
@@ -5481,11 +5261,11 @@
               </a:spcAft>
             </a:pPr>
             <a:r>
-              <a:rPr sz="3000" b="1" i="0">
+              <a:rPr sz="3000" b="0" i="0">
                 <a:solidFill>
                   <a:srgbClr val="2E3436"/>
                 </a:solidFill>
-                <a:latin typeface="Libre Caslon Display"/>
+                <a:latin typeface="Georgia"/>
               </a:rPr>
               <a:t>Check a plan that is not yours</a:t>
             </a:r>
@@ -5527,7 +5307,7 @@
                 <a:solidFill>
                   <a:srgbClr val="5C6552"/>
                 </a:solidFill>
-                <a:latin typeface="Karla"/>
+                <a:latin typeface="Calibri"/>
               </a:rPr>
               <a:t>Swap sheets with the person next to you.</a:t>
             </a:r>
@@ -5657,7 +5437,7 @@
                 <a:solidFill>
                   <a:srgbClr val="FFFDF7"/>
                 </a:solidFill>
-                <a:latin typeface="Karla"/>
+                <a:latin typeface="Calibri"/>
               </a:rPr>
               <a:t>1</a:t>
             </a:r>
@@ -5695,11 +5475,11 @@
               </a:spcAft>
             </a:pPr>
             <a:r>
-              <a:rPr sz="1300" b="1" i="0">
+              <a:rPr sz="1300" b="0" i="0">
                 <a:solidFill>
                   <a:srgbClr val="2E3570"/>
                 </a:solidFill>
-                <a:latin typeface="Libre Caslon Display"/>
+                <a:latin typeface="Georgia"/>
               </a:rPr>
               <a:t>Is every session named?</a:t>
             </a:r>
@@ -5741,7 +5521,7 @@
                 <a:solidFill>
                   <a:srgbClr val="5C6552"/>
                 </a:solidFill>
-                <a:latin typeface="Karla"/>
+                <a:latin typeface="Calibri"/>
               </a:rPr>
               <a:t>If you cannot tell what they will do in it, write a question mark next to it.</a:t>
             </a:r>
@@ -5871,7 +5651,7 @@
                 <a:solidFill>
                   <a:srgbClr val="FFFDF7"/>
                 </a:solidFill>
-                <a:latin typeface="Karla"/>
+                <a:latin typeface="Calibri"/>
               </a:rPr>
               <a:t>2</a:t>
             </a:r>
@@ -5909,11 +5689,11 @@
               </a:spcAft>
             </a:pPr>
             <a:r>
-              <a:rPr sz="1300" b="1" i="0">
+              <a:rPr sz="1300" b="0" i="0">
                 <a:solidFill>
                   <a:srgbClr val="2E3570"/>
                 </a:solidFill>
-                <a:latin typeface="Libre Caslon Display"/>
+                <a:latin typeface="Georgia"/>
               </a:rPr>
               <a:t>Is every session small enough to move?</a:t>
             </a:r>
@@ -5955,7 +5735,7 @@
                 <a:solidFill>
                   <a:srgbClr val="5C6552"/>
                 </a:solidFill>
-                <a:latin typeface="Karla"/>
+                <a:latin typeface="Calibri"/>
               </a:rPr>
               <a:t>Anything over forty-five minutes gets a circle.</a:t>
             </a:r>
@@ -6085,7 +5865,7 @@
                 <a:solidFill>
                   <a:srgbClr val="FFFDF7"/>
                 </a:solidFill>
-                <a:latin typeface="Karla"/>
+                <a:latin typeface="Calibri"/>
               </a:rPr>
               <a:t>3</a:t>
             </a:r>
@@ -6123,11 +5903,11 @@
               </a:spcAft>
             </a:pPr>
             <a:r>
-              <a:rPr sz="1300" b="1" i="0">
+              <a:rPr sz="1300" b="0" i="0">
                 <a:solidFill>
                   <a:srgbClr val="2E3570"/>
                 </a:solidFill>
-                <a:latin typeface="Libre Caslon Display"/>
+                <a:latin typeface="Georgia"/>
               </a:rPr>
               <a:t>Is there a spare slot, and did they use it?</a:t>
             </a:r>
@@ -6169,7 +5949,7 @@
                 <a:solidFill>
                   <a:srgbClr val="5C6552"/>
                 </a:solidFill>
-                <a:latin typeface="Karla"/>
+                <a:latin typeface="Calibri"/>
               </a:rPr>
               <a:t>Tick it if it is there.</a:t>
             </a:r>
@@ -6211,7 +5991,7 @@
                 <a:solidFill>
                   <a:srgbClr val="5C6552"/>
                 </a:solidFill>
-                <a:latin typeface="Karla"/>
+                <a:latin typeface="Calibri"/>
               </a:rPr>
               <a:t>Hand it back with one thing you would move, and why.</a:t>
             </a:r>
@@ -6277,7 +6057,7 @@
                 <a:solidFill>
                   <a:srgbClr val="8B9179"/>
                 </a:solidFill>
-                <a:latin typeface="Karla"/>
+                <a:latin typeface="Calibri"/>
               </a:rPr>
               <a:t>The Pastoral Guide</a:t>
             </a:r>
@@ -6319,7 +6099,7 @@
                 <a:solidFill>
                   <a:srgbClr val="8B9179"/>
                 </a:solidFill>
-                <a:latin typeface="Karla"/>
+                <a:latin typeface="Calibri"/>
               </a:rPr>
               <a:t>13 / 17</a:t>
             </a:r>
@@ -6390,19 +6170,101 @@
       </p:sp>
       <p:sp>
         <p:nvSpPr>
-          <p:cNvPr id="3" name="Rounded Rectangle 2"/>
+          <p:cNvPr id="4" name="TextBox 3"/>
+          <p:cNvSpPr txBox="1"/>
+          <p:nvPr/>
+        </p:nvSpPr>
+        <p:spPr>
+          <a:xfrm>
+            <a:off x="685800" y="896112"/>
+            <a:ext cx="7772400" cy="365760"/>
+          </a:xfrm>
+          <a:prstGeom prst="rect">
+            <a:avLst/>
+          </a:prstGeom>
+          <a:noFill/>
+        </p:spPr>
+        <p:txBody>
+          <a:bodyPr wrap="square" anchor="t" lIns="0" rIns="0" tIns="0" bIns="0">
+            <a:spAutoFit/>
+          </a:bodyPr>
+          <a:lstStyle/>
+          <a:p>
+            <a:pPr algn="l">
+              <a:lnSpc>
+                <a:spcPct val="125000"/>
+              </a:lnSpc>
+              <a:spcAft>
+                <a:spcPts val="0"/>
+              </a:spcAft>
+            </a:pPr>
+            <a:r>
+              <a:rPr sz="1200" b="1" i="0" spc="120">
+                <a:solidFill>
+                  <a:srgbClr val="C9CCE6"/>
+                </a:solidFill>
+                <a:latin typeface="Calibri"/>
+              </a:rPr>
+              <a:t>One question</a:t>
+            </a:r>
+          </a:p>
+        </p:txBody>
+      </p:sp>
+      <p:sp>
+        <p:nvSpPr>
+          <p:cNvPr id="5" name="TextBox 4"/>
+          <p:cNvSpPr txBox="1"/>
+          <p:nvPr/>
+        </p:nvSpPr>
+        <p:spPr>
+          <a:xfrm>
+            <a:off x="548640" y="1389888"/>
+            <a:ext cx="8046720" cy="1463040"/>
+          </a:xfrm>
+          <a:prstGeom prst="rect">
+            <a:avLst/>
+          </a:prstGeom>
+          <a:noFill/>
+        </p:spPr>
+        <p:txBody>
+          <a:bodyPr wrap="square" anchor="t" lIns="0" rIns="0" tIns="0" bIns="0">
+            <a:spAutoFit/>
+          </a:bodyPr>
+          <a:lstStyle/>
+          <a:p>
+            <a:pPr algn="ctr">
+              <a:lnSpc>
+                <a:spcPct val="114000"/>
+              </a:lnSpc>
+              <a:spcAft>
+                <a:spcPts val="0"/>
+              </a:spcAft>
+            </a:pPr>
+            <a:r>
+              <a:rPr sz="2800" b="0" i="0">
+                <a:solidFill>
+                  <a:srgbClr val="FFFDF7"/>
+                </a:solidFill>
+                <a:latin typeface="Georgia"/>
+              </a:rPr>
+              <a:t>Is a plan that changed three times in a week a failed plan?</a:t>
+            </a:r>
+          </a:p>
+        </p:txBody>
+      </p:sp>
+      <p:sp>
+        <p:nvSpPr>
+          <p:cNvPr id="6" name="Rectangle 5"/>
           <p:cNvSpPr/>
           <p:nvPr/>
         </p:nvSpPr>
         <p:spPr>
           <a:xfrm>
-            <a:off x="685800" y="548640"/>
-            <a:ext cx="955431" cy="237744"/>
-          </a:xfrm>
-          <a:prstGeom prst="roundRect">
-            <a:avLst>
-              <a:gd name="adj" fmla="val 50000"/>
-            </a:avLst>
+            <a:off x="4114800" y="3108960"/>
+            <a:ext cx="914400" cy="18288"/>
+          </a:xfrm>
+          <a:prstGeom prst="rect">
+            <a:avLst/>
           </a:prstGeom>
           <a:solidFill>
             <a:srgbClr val="C9CCE6"/>
@@ -6427,143 +6289,6 @@
           </a:fontRef>
         </p:style>
         <p:txBody>
-          <a:bodyPr rtlCol="0" anchor="ctr" wrap="none" lIns="0" rIns="0" tIns="0" bIns="0"/>
-          <a:lstStyle/>
-          <a:p>
-            <a:pPr algn="ctr"/>
-            <a:r>
-              <a:rPr sz="950" b="1" spc="90">
-                <a:solidFill>
-                  <a:srgbClr val="2E3570"/>
-                </a:solidFill>
-                <a:latin typeface="Karla"/>
-              </a:rPr>
-              <a:t>DISCUSS</a:t>
-            </a:r>
-          </a:p>
-        </p:txBody>
-      </p:sp>
-      <p:sp>
-        <p:nvSpPr>
-          <p:cNvPr id="4" name="TextBox 3"/>
-          <p:cNvSpPr txBox="1"/>
-          <p:nvPr/>
-        </p:nvSpPr>
-        <p:spPr>
-          <a:xfrm>
-            <a:off x="685800" y="896112"/>
-            <a:ext cx="7772400" cy="365760"/>
-          </a:xfrm>
-          <a:prstGeom prst="rect">
-            <a:avLst/>
-          </a:prstGeom>
-          <a:noFill/>
-        </p:spPr>
-        <p:txBody>
-          <a:bodyPr wrap="square" anchor="t" lIns="0" rIns="0" tIns="0" bIns="0">
-            <a:spAutoFit/>
-          </a:bodyPr>
-          <a:lstStyle/>
-          <a:p>
-            <a:pPr algn="l">
-              <a:lnSpc>
-                <a:spcPct val="125000"/>
-              </a:lnSpc>
-              <a:spcAft>
-                <a:spcPts val="0"/>
-              </a:spcAft>
-            </a:pPr>
-            <a:r>
-              <a:rPr sz="1200" b="1" i="0" spc="120">
-                <a:solidFill>
-                  <a:srgbClr val="C9CCE6"/>
-                </a:solidFill>
-                <a:latin typeface="Karla"/>
-              </a:rPr>
-              <a:t>One question</a:t>
-            </a:r>
-          </a:p>
-        </p:txBody>
-      </p:sp>
-      <p:sp>
-        <p:nvSpPr>
-          <p:cNvPr id="5" name="TextBox 4"/>
-          <p:cNvSpPr txBox="1"/>
-          <p:nvPr/>
-        </p:nvSpPr>
-        <p:spPr>
-          <a:xfrm>
-            <a:off x="548640" y="1389888"/>
-            <a:ext cx="8046720" cy="1463040"/>
-          </a:xfrm>
-          <a:prstGeom prst="rect">
-            <a:avLst/>
-          </a:prstGeom>
-          <a:noFill/>
-        </p:spPr>
-        <p:txBody>
-          <a:bodyPr wrap="square" anchor="t" lIns="0" rIns="0" tIns="0" bIns="0">
-            <a:spAutoFit/>
-          </a:bodyPr>
-          <a:lstStyle/>
-          <a:p>
-            <a:pPr algn="ctr">
-              <a:lnSpc>
-                <a:spcPct val="114000"/>
-              </a:lnSpc>
-              <a:spcAft>
-                <a:spcPts val="0"/>
-              </a:spcAft>
-            </a:pPr>
-            <a:r>
-              <a:rPr sz="2800" b="1" i="0">
-                <a:solidFill>
-                  <a:srgbClr val="FFFDF7"/>
-                </a:solidFill>
-                <a:latin typeface="Libre Caslon Display"/>
-              </a:rPr>
-              <a:t>Is a plan that changed three times in a week a failed plan?</a:t>
-            </a:r>
-          </a:p>
-        </p:txBody>
-      </p:sp>
-      <p:sp>
-        <p:nvSpPr>
-          <p:cNvPr id="6" name="Rectangle 5"/>
-          <p:cNvSpPr/>
-          <p:nvPr/>
-        </p:nvSpPr>
-        <p:spPr>
-          <a:xfrm>
-            <a:off x="4114800" y="3108960"/>
-            <a:ext cx="914400" cy="18288"/>
-          </a:xfrm>
-          <a:prstGeom prst="rect">
-            <a:avLst/>
-          </a:prstGeom>
-          <a:solidFill>
-            <a:srgbClr val="C9CCE6"/>
-          </a:solidFill>
-          <a:ln>
-            <a:noFill/>
-          </a:ln>
-          <a:effectLst/>
-        </p:spPr>
-        <p:style>
-          <a:lnRef idx="1">
-            <a:schemeClr val="accent1"/>
-          </a:lnRef>
-          <a:fillRef idx="3">
-            <a:schemeClr val="accent1"/>
-          </a:fillRef>
-          <a:effectRef idx="2">
-            <a:schemeClr val="accent1"/>
-          </a:effectRef>
-          <a:fontRef idx="minor">
-            <a:schemeClr val="lt1"/>
-          </a:fontRef>
-        </p:style>
-        <p:txBody>
           <a:bodyPr rtlCol="0" anchor="ctr"/>
           <a:lstStyle/>
           <a:p>
@@ -6606,7 +6331,7 @@
                 <a:solidFill>
                   <a:srgbClr val="C9CCE6"/>
                 </a:solidFill>
-                <a:latin typeface="Karla"/>
+                <a:latin typeface="Calibri"/>
               </a:rPr>
               <a:t>Hands up for yes, hands up for no, and then somebody from each side says why.</a:t>
             </a:r>
@@ -6672,7 +6397,7 @@
                 <a:solidFill>
                   <a:srgbClr val="C9CCE6"/>
                 </a:solidFill>
-                <a:latin typeface="Karla"/>
+                <a:latin typeface="Calibri"/>
               </a:rPr>
               <a:t>The Pastoral Guide</a:t>
             </a:r>
@@ -6714,7 +6439,7 @@
                 <a:solidFill>
                   <a:srgbClr val="C9CCE6"/>
                 </a:solidFill>
-                <a:latin typeface="Karla"/>
+                <a:latin typeface="Calibri"/>
               </a:rPr>
               <a:t>14 / 17</a:t>
             </a:r>
@@ -6785,61 +6510,6 @@
       </p:sp>
       <p:sp>
         <p:nvSpPr>
-          <p:cNvPr id="3" name="Rounded Rectangle 2"/>
-          <p:cNvSpPr/>
-          <p:nvPr/>
-        </p:nvSpPr>
-        <p:spPr>
-          <a:xfrm>
-            <a:off x="685800" y="548640"/>
-            <a:ext cx="646431" cy="237744"/>
-          </a:xfrm>
-          <a:prstGeom prst="roundRect">
-            <a:avLst>
-              <a:gd name="adj" fmla="val 50000"/>
-            </a:avLst>
-          </a:prstGeom>
-          <a:solidFill>
-            <a:srgbClr val="EEEFF7"/>
-          </a:solidFill>
-          <a:ln>
-            <a:noFill/>
-          </a:ln>
-          <a:effectLst/>
-        </p:spPr>
-        <p:style>
-          <a:lnRef idx="1">
-            <a:schemeClr val="accent1"/>
-          </a:lnRef>
-          <a:fillRef idx="3">
-            <a:schemeClr val="accent1"/>
-          </a:fillRef>
-          <a:effectRef idx="2">
-            <a:schemeClr val="accent1"/>
-          </a:effectRef>
-          <a:fontRef idx="minor">
-            <a:schemeClr val="lt1"/>
-          </a:fontRef>
-        </p:style>
-        <p:txBody>
-          <a:bodyPr rtlCol="0" anchor="ctr" wrap="none" lIns="0" rIns="0" tIns="0" bIns="0"/>
-          <a:lstStyle/>
-          <a:p>
-            <a:pPr algn="ctr"/>
-            <a:r>
-              <a:rPr sz="950" b="1" spc="90">
-                <a:solidFill>
-                  <a:srgbClr val="2E3570"/>
-                </a:solidFill>
-                <a:latin typeface="Karla"/>
-              </a:rPr>
-              <a:t>EXIT</a:t>
-            </a:r>
-          </a:p>
-        </p:txBody>
-      </p:sp>
-      <p:sp>
-        <p:nvSpPr>
           <p:cNvPr id="4" name="TextBox 3"/>
           <p:cNvSpPr txBox="1"/>
           <p:nvPr/>
@@ -6869,11 +6539,11 @@
               </a:spcAft>
             </a:pPr>
             <a:r>
-              <a:rPr sz="3000" b="1" i="0">
+              <a:rPr sz="3000" b="0" i="0">
                 <a:solidFill>
                   <a:srgbClr val="2E3436"/>
                 </a:solidFill>
-                <a:latin typeface="Libre Caslon Display"/>
+                <a:latin typeface="Georgia"/>
               </a:rPr>
               <a:t>Monday morning</a:t>
             </a:r>
@@ -6915,7 +6585,7 @@
                 <a:solidFill>
                   <a:srgbClr val="5C6552"/>
                 </a:solidFill>
-                <a:latin typeface="Karla"/>
+                <a:latin typeface="Calibri"/>
               </a:rPr>
               <a:t>At the bottom of the sheet, private, not collected.</a:t>
             </a:r>
@@ -7045,7 +6715,7 @@
                 <a:solidFill>
                   <a:srgbClr val="FFFDF7"/>
                 </a:solidFill>
-                <a:latin typeface="Karla"/>
+                <a:latin typeface="Calibri"/>
               </a:rPr>
               <a:t>1</a:t>
             </a:r>
@@ -7083,11 +6753,11 @@
               </a:spcAft>
             </a:pPr>
             <a:r>
-              <a:rPr sz="1300" b="1" i="0">
+              <a:rPr sz="1300" b="0" i="0">
                 <a:solidFill>
                   <a:srgbClr val="2E3570"/>
                 </a:solidFill>
-                <a:latin typeface="Libre Caslon Display"/>
+                <a:latin typeface="Georgia"/>
               </a:rPr>
               <a:t>Your first session</a:t>
             </a:r>
@@ -7129,7 +6799,7 @@
                 <a:solidFill>
                   <a:srgbClr val="5C6552"/>
                 </a:solidFill>
-                <a:latin typeface="Karla"/>
+                <a:latin typeface="Calibri"/>
               </a:rPr>
               <a:t>Day, time, subject, topic, what you will do. The whole line.</a:t>
             </a:r>
@@ -7259,7 +6929,7 @@
                 <a:solidFill>
                   <a:srgbClr val="FFFDF7"/>
                 </a:solidFill>
-                <a:latin typeface="Karla"/>
+                <a:latin typeface="Calibri"/>
               </a:rPr>
               <a:t>2</a:t>
             </a:r>
@@ -7297,11 +6967,11 @@
               </a:spcAft>
             </a:pPr>
             <a:r>
-              <a:rPr sz="1300" b="1" i="0">
+              <a:rPr sz="1300" b="0" i="0">
                 <a:solidFill>
                   <a:srgbClr val="2E3570"/>
                 </a:solidFill>
-                <a:latin typeface="Libre Caslon Display"/>
+                <a:latin typeface="Georgia"/>
               </a:rPr>
               <a:t>Where the sheet is going</a:t>
             </a:r>
@@ -7343,7 +7013,7 @@
                 <a:solidFill>
                   <a:srgbClr val="5C6552"/>
                 </a:solidFill>
-                <a:latin typeface="Karla"/>
+                <a:latin typeface="Calibri"/>
               </a:rPr>
               <a:t>A wall, a folder, the inside of a planner. Somewhere you will see it on Monday.</a:t>
             </a:r>
@@ -7385,7 +7055,7 @@
                 <a:solidFill>
                   <a:srgbClr val="5C6552"/>
                 </a:solidFill>
-                <a:latin typeface="Karla"/>
+                <a:latin typeface="Calibri"/>
               </a:rPr>
               <a:t>Bring the sheet on Monday. The check-in takes two minutes.</a:t>
             </a:r>
@@ -7451,7 +7121,7 @@
                 <a:solidFill>
                   <a:srgbClr val="8B9179"/>
                 </a:solidFill>
-                <a:latin typeface="Karla"/>
+                <a:latin typeface="Calibri"/>
               </a:rPr>
               <a:t>The Pastoral Guide</a:t>
             </a:r>
@@ -7493,7 +7163,7 @@
                 <a:solidFill>
                   <a:srgbClr val="8B9179"/>
                 </a:solidFill>
-                <a:latin typeface="Karla"/>
+                <a:latin typeface="Calibri"/>
               </a:rPr>
               <a:t>15 / 17</a:t>
             </a:r>
@@ -7617,11 +7287,11 @@
               </a:spcAft>
             </a:pPr>
             <a:r>
-              <a:rPr sz="3200" b="1" i="0">
+              <a:rPr sz="3200" b="0" i="0">
                 <a:solidFill>
                   <a:srgbClr val="2E3570"/>
                 </a:solidFill>
-                <a:latin typeface="Libre Caslon Display"/>
+                <a:latin typeface="Georgia"/>
               </a:rPr>
               <a:t>Plan the week you will have.</a:t>
             </a:r>
@@ -7663,7 +7333,7 @@
                 <a:solidFill>
                   <a:srgbClr val="5C6552"/>
                 </a:solidFill>
-                <a:latin typeface="Karla"/>
+                <a:latin typeface="Calibri"/>
               </a:rPr>
               <a:t>Not the week you wish for. Small sessions, named, with a spare slot, a week at a time.</a:t>
             </a:r>
@@ -7705,7 +7375,7 @@
                 <a:solidFill>
                   <a:srgbClr val="8B9179"/>
                 </a:solidFill>
-                <a:latin typeface="Karla"/>
+                <a:latin typeface="Calibri"/>
               </a:rPr>
               <a:t>The Pastoral Guide  ·  thepastoralguide.com</a:t>
             </a:r>
@@ -7771,7 +7441,7 @@
                 <a:solidFill>
                   <a:srgbClr val="8B9179"/>
                 </a:solidFill>
-                <a:latin typeface="Karla"/>
+                <a:latin typeface="Calibri"/>
               </a:rPr>
               <a:t>The Pastoral Guide</a:t>
             </a:r>
@@ -7813,7 +7483,7 @@
                 <a:solidFill>
                   <a:srgbClr val="8B9179"/>
                 </a:solidFill>
-                <a:latin typeface="Karla"/>
+                <a:latin typeface="Calibri"/>
               </a:rPr>
               <a:t>16 / 17</a:t>
             </a:r>
@@ -7930,7 +7600,7 @@
                 <a:solidFill>
                   <a:srgbClr val="2E3570"/>
                 </a:solidFill>
-                <a:latin typeface="Karla"/>
+                <a:latin typeface="Calibri"/>
               </a:rPr>
               <a:t>MONDAY CHECK-IN</a:t>
             </a:r>
@@ -7968,11 +7638,11 @@
               </a:spcAft>
             </a:pPr>
             <a:r>
-              <a:rPr sz="3000" b="1" i="0">
+              <a:rPr sz="3000" b="0" i="0">
                 <a:solidFill>
                   <a:srgbClr val="2E3436"/>
                 </a:solidFill>
-                <a:latin typeface="Libre Caslon Display"/>
+                <a:latin typeface="Georgia"/>
               </a:rPr>
               <a:t>What survived last week?</a:t>
             </a:r>
@@ -8014,7 +7684,7 @@
                 <a:solidFill>
                   <a:srgbClr val="5C6552"/>
                 </a:solidFill>
-                <a:latin typeface="Karla"/>
+                <a:latin typeface="Calibri"/>
               </a:rPr>
               <a:t>Two minutes at registration, with last week’s sheet out.</a:t>
             </a:r>
@@ -8144,7 +7814,7 @@
                 <a:solidFill>
                   <a:srgbClr val="FFFDF7"/>
                 </a:solidFill>
-                <a:latin typeface="Karla"/>
+                <a:latin typeface="Calibri"/>
               </a:rPr>
               <a:t>1</a:t>
             </a:r>
@@ -8182,11 +7852,11 @@
               </a:spcAft>
             </a:pPr>
             <a:r>
-              <a:rPr sz="1300" b="1" i="0">
+              <a:rPr sz="1300" b="0" i="0">
                 <a:solidFill>
                   <a:srgbClr val="2E3570"/>
                 </a:solidFill>
-                <a:latin typeface="Libre Caslon Display"/>
+                <a:latin typeface="Georgia"/>
               </a:rPr>
               <a:t>What survived?</a:t>
             </a:r>
@@ -8228,7 +7898,7 @@
                 <a:solidFill>
                   <a:srgbClr val="5C6552"/>
                 </a:solidFill>
-                <a:latin typeface="Karla"/>
+                <a:latin typeface="Calibri"/>
               </a:rPr>
               <a:t>How many sessions happened? Tick them.</a:t>
             </a:r>
@@ -8358,7 +8028,7 @@
                 <a:solidFill>
                   <a:srgbClr val="FFFDF7"/>
                 </a:solidFill>
-                <a:latin typeface="Karla"/>
+                <a:latin typeface="Calibri"/>
               </a:rPr>
               <a:t>2</a:t>
             </a:r>
@@ -8396,11 +8066,11 @@
               </a:spcAft>
             </a:pPr>
             <a:r>
-              <a:rPr sz="1300" b="1" i="0">
+              <a:rPr sz="1300" b="0" i="0">
                 <a:solidFill>
                   <a:srgbClr val="2E3570"/>
                 </a:solidFill>
-                <a:latin typeface="Libre Caslon Display"/>
+                <a:latin typeface="Georgia"/>
               </a:rPr>
               <a:t>What moved, and where did it go?</a:t>
             </a:r>
@@ -8442,7 +8112,7 @@
                 <a:solidFill>
                   <a:srgbClr val="5C6552"/>
                 </a:solidFill>
-                <a:latin typeface="Karla"/>
+                <a:latin typeface="Calibri"/>
               </a:rPr>
               <a:t>If it went into the spare slot, the plan worked.</a:t>
             </a:r>
@@ -8572,7 +8242,7 @@
                 <a:solidFill>
                   <a:srgbClr val="FFFDF7"/>
                 </a:solidFill>
-                <a:latin typeface="Karla"/>
+                <a:latin typeface="Calibri"/>
               </a:rPr>
               <a:t>3</a:t>
             </a:r>
@@ -8610,11 +8280,11 @@
               </a:spcAft>
             </a:pPr>
             <a:r>
-              <a:rPr sz="1300" b="1" i="0">
+              <a:rPr sz="1300" b="0" i="0">
                 <a:solidFill>
                   <a:srgbClr val="2E3570"/>
                 </a:solidFill>
-                <a:latin typeface="Libre Caslon Display"/>
+                <a:latin typeface="Georgia"/>
               </a:rPr>
               <a:t>What is the first session this week?</a:t>
             </a:r>
@@ -8656,7 +8326,7 @@
                 <a:solidFill>
                   <a:srgbClr val="5C6552"/>
                 </a:solidFill>
-                <a:latin typeface="Karla"/>
+                <a:latin typeface="Calibri"/>
               </a:rPr>
               <a:t>Write it on the new sheet before the bell.</a:t>
             </a:r>
@@ -8698,7 +8368,7 @@
                 <a:solidFill>
                   <a:srgbClr val="5C6552"/>
                 </a:solidFill>
-                <a:latin typeface="Karla"/>
+                <a:latin typeface="Calibri"/>
               </a:rPr>
               <a:t>Then put the sheet away. That is the whole check-in.</a:t>
             </a:r>
@@ -8764,7 +8434,7 @@
                 <a:solidFill>
                   <a:srgbClr val="8B9179"/>
                 </a:solidFill>
-                <a:latin typeface="Karla"/>
+                <a:latin typeface="Calibri"/>
               </a:rPr>
               <a:t>The Pastoral Guide</a:t>
             </a:r>
@@ -8806,7 +8476,7 @@
                 <a:solidFill>
                   <a:srgbClr val="8B9179"/>
                 </a:solidFill>
-                <a:latin typeface="Karla"/>
+                <a:latin typeface="Calibri"/>
               </a:rPr>
               <a:t>17 / 17</a:t>
             </a:r>
@@ -8923,7 +8593,7 @@
                 <a:solidFill>
                   <a:srgbClr val="2E3570"/>
                 </a:solidFill>
-                <a:latin typeface="Karla"/>
+                <a:latin typeface="Calibri"/>
               </a:rPr>
               <a:t>TEACHER SLIDE  ·  SKIP IT</a:t>
             </a:r>
@@ -8961,11 +8631,11 @@
               </a:spcAft>
             </a:pPr>
             <a:r>
-              <a:rPr sz="3000" b="1" i="0">
+              <a:rPr sz="3000" b="0" i="0">
                 <a:solidFill>
                   <a:srgbClr val="2E3436"/>
                 </a:solidFill>
-                <a:latin typeface="Libre Caslon Display"/>
+                <a:latin typeface="Georgia"/>
               </a:rPr>
               <a:t>Before the lesson</a:t>
             </a:r>
@@ -9007,7 +8677,7 @@
                 <a:solidFill>
                   <a:srgbClr val="5C6552"/>
                 </a:solidFill>
-                <a:latin typeface="Karla"/>
+                <a:latin typeface="Calibri"/>
               </a:rPr>
               <a:t>One sheet per student, in pencil. Nothing written today is collected.</a:t>
             </a:r>
@@ -9137,7 +8807,7 @@
                 <a:solidFill>
                   <a:srgbClr val="FFFDF7"/>
                 </a:solidFill>
-                <a:latin typeface="Karla"/>
+                <a:latin typeface="Calibri"/>
               </a:rPr>
               <a:t>1</a:t>
             </a:r>
@@ -9175,11 +8845,11 @@
               </a:spcAft>
             </a:pPr>
             <a:r>
-              <a:rPr sz="1300" b="1" i="0">
+              <a:rPr sz="1300" b="0" i="0">
                 <a:solidFill>
                   <a:srgbClr val="2E3570"/>
                 </a:solidFill>
-                <a:latin typeface="Libre Caslon Display"/>
+                <a:latin typeface="Georgia"/>
               </a:rPr>
               <a:t>Print the week sheet, one per student</a:t>
             </a:r>
@@ -9221,7 +8891,7 @@
                 <a:solidFill>
                   <a:srgbClr val="5C6552"/>
                 </a:solidFill>
-                <a:latin typeface="Karla"/>
+                <a:latin typeface="Calibri"/>
               </a:rPr>
               <a:t>It is page 2 of the pack. Pencils, because the plan gets repaired three times.</a:t>
             </a:r>
@@ -9351,7 +9021,7 @@
                 <a:solidFill>
                   <a:srgbClr val="FFFDF7"/>
                 </a:solidFill>
-                <a:latin typeface="Karla"/>
+                <a:latin typeface="Calibri"/>
               </a:rPr>
               <a:t>2</a:t>
             </a:r>
@@ -9389,11 +9059,11 @@
               </a:spcAft>
             </a:pPr>
             <a:r>
-              <a:rPr sz="1300" b="1" i="0">
+              <a:rPr sz="1300" b="0" i="0">
                 <a:solidFill>
                   <a:srgbClr val="2E3570"/>
                 </a:solidFill>
-                <a:latin typeface="Libre Caslon Display"/>
+                <a:latin typeface="Georgia"/>
               </a:rPr>
               <a:t>The three interruptions are slides 9, 10 and 11</a:t>
             </a:r>
@@ -9435,7 +9105,7 @@
                 <a:solidFill>
                   <a:srgbClr val="5C6552"/>
                 </a:solidFill>
-                <a:latin typeface="Karla"/>
+                <a:latin typeface="Calibri"/>
               </a:rPr>
               <a:t>Read each one out, then give the room two minutes to repair the plan.</a:t>
             </a:r>
@@ -9565,7 +9235,7 @@
                 <a:solidFill>
                   <a:srgbClr val="FFFDF7"/>
                 </a:solidFill>
-                <a:latin typeface="Karla"/>
+                <a:latin typeface="Calibri"/>
               </a:rPr>
               <a:t>3</a:t>
             </a:r>
@@ -9603,11 +9273,11 @@
               </a:spcAft>
             </a:pPr>
             <a:r>
-              <a:rPr sz="1300" b="1" i="0">
+              <a:rPr sz="1300" b="0" i="0">
                 <a:solidFill>
                   <a:srgbClr val="2E3570"/>
                 </a:solidFill>
-                <a:latin typeface="Libre Caslon Display"/>
+                <a:latin typeface="Georgia"/>
               </a:rPr>
               <a:t>Keep slide 17 for the Mondays after</a:t>
             </a:r>
@@ -9649,7 +9319,7 @@
                 <a:solidFill>
                   <a:srgbClr val="5C6552"/>
                 </a:solidFill>
-                <a:latin typeface="Karla"/>
+                <a:latin typeface="Calibri"/>
               </a:rPr>
               <a:t>A two-minute check-in at registration.</a:t>
             </a:r>
@@ -9691,7 +9361,7 @@
                 <a:solidFill>
                   <a:srgbClr val="5C6552"/>
                 </a:solidFill>
-                <a:latin typeface="Karla"/>
+                <a:latin typeface="Calibri"/>
               </a:rPr>
               <a:t>The pack has the hour minute by minute against these slide numbers.</a:t>
             </a:r>
@@ -9757,7 +9427,7 @@
                 <a:solidFill>
                   <a:srgbClr val="8B9179"/>
                 </a:solidFill>
-                <a:latin typeface="Karla"/>
+                <a:latin typeface="Calibri"/>
               </a:rPr>
               <a:t>The Pastoral Guide</a:t>
             </a:r>
@@ -9799,7 +9469,7 @@
                 <a:solidFill>
                   <a:srgbClr val="8B9179"/>
                 </a:solidFill>
-                <a:latin typeface="Karla"/>
+                <a:latin typeface="Calibri"/>
               </a:rPr>
               <a:t>2 / 17</a:t>
             </a:r>
@@ -9870,61 +9540,6 @@
       </p:sp>
       <p:sp>
         <p:nvSpPr>
-          <p:cNvPr id="3" name="Rounded Rectangle 2"/>
-          <p:cNvSpPr/>
-          <p:nvPr/>
-        </p:nvSpPr>
-        <p:spPr>
-          <a:xfrm>
-            <a:off x="685800" y="548640"/>
-            <a:ext cx="966841" cy="237744"/>
-          </a:xfrm>
-          <a:prstGeom prst="roundRect">
-            <a:avLst>
-              <a:gd name="adj" fmla="val 50000"/>
-            </a:avLst>
-          </a:prstGeom>
-          <a:solidFill>
-            <a:srgbClr val="EEEFF7"/>
-          </a:solidFill>
-          <a:ln>
-            <a:noFill/>
-          </a:ln>
-          <a:effectLst/>
-        </p:spPr>
-        <p:style>
-          <a:lnRef idx="1">
-            <a:schemeClr val="accent1"/>
-          </a:lnRef>
-          <a:fillRef idx="3">
-            <a:schemeClr val="accent1"/>
-          </a:fillRef>
-          <a:effectRef idx="2">
-            <a:schemeClr val="accent1"/>
-          </a:effectRef>
-          <a:fontRef idx="minor">
-            <a:schemeClr val="lt1"/>
-          </a:fontRef>
-        </p:style>
-        <p:txBody>
-          <a:bodyPr rtlCol="0" anchor="ctr" wrap="none" lIns="0" rIns="0" tIns="0" bIns="0"/>
-          <a:lstStyle/>
-          <a:p>
-            <a:pPr algn="ctr"/>
-            <a:r>
-              <a:rPr sz="950" b="1" spc="90">
-                <a:solidFill>
-                  <a:srgbClr val="2E3570"/>
-                </a:solidFill>
-                <a:latin typeface="Karla"/>
-              </a:rPr>
-              <a:t>STARTER</a:t>
-            </a:r>
-          </a:p>
-        </p:txBody>
-      </p:sp>
-      <p:sp>
-        <p:nvSpPr>
           <p:cNvPr id="4" name="TextBox 3"/>
           <p:cNvSpPr txBox="1"/>
           <p:nvPr/>
@@ -9954,11 +9569,11 @@
               </a:spcAft>
             </a:pPr>
             <a:r>
-              <a:rPr sz="3000" b="1" i="0">
+              <a:rPr sz="3000" b="0" i="0">
                 <a:solidFill>
                   <a:srgbClr val="2E3436"/>
                 </a:solidFill>
-                <a:latin typeface="Libre Caslon Display"/>
+                <a:latin typeface="Georgia"/>
               </a:rPr>
               <a:t>The last plan you made</a:t>
             </a:r>
@@ -10000,7 +9615,7 @@
                 <a:solidFill>
                   <a:srgbClr val="5C6552"/>
                 </a:solidFill>
-                <a:latin typeface="Karla"/>
+                <a:latin typeface="Calibri"/>
               </a:rPr>
               <a:t>Two minutes, on your own, nobody sees it.</a:t>
             </a:r>
@@ -10130,7 +9745,7 @@
                 <a:solidFill>
                   <a:srgbClr val="FFFDF7"/>
                 </a:solidFill>
-                <a:latin typeface="Karla"/>
+                <a:latin typeface="Calibri"/>
               </a:rPr>
               <a:t>1</a:t>
             </a:r>
@@ -10168,11 +9783,11 @@
               </a:spcAft>
             </a:pPr>
             <a:r>
-              <a:rPr sz="1300" b="1" i="0">
+              <a:rPr sz="1300" b="0" i="0">
                 <a:solidFill>
                   <a:srgbClr val="2E3570"/>
                 </a:solidFill>
-                <a:latin typeface="Libre Caslon Display"/>
+                <a:latin typeface="Georgia"/>
               </a:rPr>
               <a:t>When did you last make a revision timetable?</a:t>
             </a:r>
@@ -10214,7 +9829,7 @@
                 <a:solidFill>
                   <a:srgbClr val="5C6552"/>
                 </a:solidFill>
-                <a:latin typeface="Karla"/>
+                <a:latin typeface="Calibri"/>
               </a:rPr>
               <a:t>A proper one, with days and subjects on it.</a:t>
             </a:r>
@@ -10344,7 +9959,7 @@
                 <a:solidFill>
                   <a:srgbClr val="FFFDF7"/>
                 </a:solidFill>
-                <a:latin typeface="Karla"/>
+                <a:latin typeface="Calibri"/>
               </a:rPr>
               <a:t>2</a:t>
             </a:r>
@@ -10382,11 +9997,11 @@
               </a:spcAft>
             </a:pPr>
             <a:r>
-              <a:rPr sz="1300" b="1" i="0">
+              <a:rPr sz="1300" b="0" i="0">
                 <a:solidFill>
                   <a:srgbClr val="2E3570"/>
                 </a:solidFill>
-                <a:latin typeface="Libre Caslon Display"/>
+                <a:latin typeface="Georgia"/>
               </a:rPr>
               <a:t>How long did it last?</a:t>
             </a:r>
@@ -10428,7 +10043,7 @@
                 <a:solidFill>
                   <a:srgbClr val="5C6552"/>
                 </a:solidFill>
-                <a:latin typeface="Karla"/>
+                <a:latin typeface="Calibri"/>
               </a:rPr>
               <a:t>Be honest. A day, a week, until the first thing came up?</a:t>
             </a:r>
@@ -10558,7 +10173,7 @@
                 <a:solidFill>
                   <a:srgbClr val="FFFDF7"/>
                 </a:solidFill>
-                <a:latin typeface="Karla"/>
+                <a:latin typeface="Calibri"/>
               </a:rPr>
               <a:t>3</a:t>
             </a:r>
@@ -10596,11 +10211,11 @@
               </a:spcAft>
             </a:pPr>
             <a:r>
-              <a:rPr sz="1300" b="1" i="0">
+              <a:rPr sz="1300" b="0" i="0">
                 <a:solidFill>
                   <a:srgbClr val="2E3570"/>
                 </a:solidFill>
-                <a:latin typeface="Libre Caslon Display"/>
+                <a:latin typeface="Georgia"/>
               </a:rPr>
               <a:t>What happened to it?</a:t>
             </a:r>
@@ -10642,7 +10257,7 @@
                 <a:solidFill>
                   <a:srgbClr val="5C6552"/>
                 </a:solidFill>
-                <a:latin typeface="Karla"/>
+                <a:latin typeface="Calibri"/>
               </a:rPr>
               <a:t>Not why it failed. Just what happened.</a:t>
             </a:r>
@@ -10684,7 +10299,7 @@
                 <a:solidFill>
                   <a:srgbClr val="5C6552"/>
                 </a:solidFill>
-                <a:latin typeface="Karla"/>
+                <a:latin typeface="Calibri"/>
               </a:rPr>
               <a:t>Keep the answer. The lesson is about the thing that happened.</a:t>
             </a:r>
@@ -10750,7 +10365,7 @@
                 <a:solidFill>
                   <a:srgbClr val="8B9179"/>
                 </a:solidFill>
-                <a:latin typeface="Karla"/>
+                <a:latin typeface="Calibri"/>
               </a:rPr>
               <a:t>The Pastoral Guide</a:t>
             </a:r>
@@ -10792,7 +10407,7 @@
                 <a:solidFill>
                   <a:srgbClr val="8B9179"/>
                 </a:solidFill>
-                <a:latin typeface="Karla"/>
+                <a:latin typeface="Calibri"/>
               </a:rPr>
               <a:t>3 / 17</a:t>
             </a:r>
@@ -10863,61 +10478,6 @@
       </p:sp>
       <p:sp>
         <p:nvSpPr>
-          <p:cNvPr id="3" name="Rounded Rectangle 2"/>
-          <p:cNvSpPr/>
-          <p:nvPr/>
-        </p:nvSpPr>
-        <p:spPr>
-          <a:xfrm>
-            <a:off x="685800" y="548640"/>
-            <a:ext cx="1597294" cy="237744"/>
-          </a:xfrm>
-          <a:prstGeom prst="roundRect">
-            <a:avLst>
-              <a:gd name="adj" fmla="val 50000"/>
-            </a:avLst>
-          </a:prstGeom>
-          <a:solidFill>
-            <a:srgbClr val="EEEFF7"/>
-          </a:solidFill>
-          <a:ln>
-            <a:noFill/>
-          </a:ln>
-          <a:effectLst/>
-        </p:spPr>
-        <p:style>
-          <a:lnRef idx="1">
-            <a:schemeClr val="accent1"/>
-          </a:lnRef>
-          <a:fillRef idx="3">
-            <a:schemeClr val="accent1"/>
-          </a:fillRef>
-          <a:effectRef idx="2">
-            <a:schemeClr val="accent1"/>
-          </a:effectRef>
-          <a:fontRef idx="minor">
-            <a:schemeClr val="lt1"/>
-          </a:fontRef>
-        </p:style>
-        <p:txBody>
-          <a:bodyPr rtlCol="0" anchor="ctr" wrap="none" lIns="0" rIns="0" tIns="0" bIns="0"/>
-          <a:lstStyle/>
-          <a:p>
-            <a:pPr algn="ctr"/>
-            <a:r>
-              <a:rPr sz="950" b="1" spc="90">
-                <a:solidFill>
-                  <a:srgbClr val="2E3570"/>
-                </a:solidFill>
-                <a:latin typeface="Karla"/>
-              </a:rPr>
-              <a:t>WHAT HAPPENED</a:t>
-            </a:r>
-          </a:p>
-        </p:txBody>
-      </p:sp>
-      <p:sp>
-        <p:nvSpPr>
           <p:cNvPr id="4" name="TextBox 3"/>
           <p:cNvSpPr txBox="1"/>
           <p:nvPr/>
@@ -10947,11 +10507,11 @@
               </a:spcAft>
             </a:pPr>
             <a:r>
-              <a:rPr sz="3000" b="1" i="0">
+              <a:rPr sz="3000" b="0" i="0">
                 <a:solidFill>
                   <a:srgbClr val="2E3436"/>
                 </a:solidFill>
-                <a:latin typeface="Libre Caslon Display"/>
+                <a:latin typeface="Georgia"/>
               </a:rPr>
               <a:t>What usually happens to a plan</a:t>
             </a:r>
@@ -11081,7 +10641,7 @@
                 <a:solidFill>
                   <a:srgbClr val="FFFDF7"/>
                 </a:solidFill>
-                <a:latin typeface="Karla"/>
+                <a:latin typeface="Calibri"/>
               </a:rPr>
               <a:t>1</a:t>
             </a:r>
@@ -11119,11 +10679,11 @@
               </a:spcAft>
             </a:pPr>
             <a:r>
-              <a:rPr sz="1300" b="1" i="0">
+              <a:rPr sz="1300" b="0" i="0">
                 <a:solidFill>
                   <a:srgbClr val="2E3570"/>
                 </a:solidFill>
-                <a:latin typeface="Libre Caslon Display"/>
+                <a:latin typeface="Georgia"/>
               </a:rPr>
               <a:t>Monday looked fine</a:t>
             </a:r>
@@ -11165,7 +10725,7 @@
                 <a:solidFill>
                   <a:srgbClr val="5C6552"/>
                 </a:solidFill>
-                <a:latin typeface="Karla"/>
+                <a:latin typeface="Calibri"/>
               </a:rPr>
               <a:t>Every evening was free on paper, and the plan filled all of them.</a:t>
             </a:r>
@@ -11295,7 +10855,7 @@
                 <a:solidFill>
                   <a:srgbClr val="FFFDF7"/>
                 </a:solidFill>
-                <a:latin typeface="Karla"/>
+                <a:latin typeface="Calibri"/>
               </a:rPr>
               <a:t>2</a:t>
             </a:r>
@@ -11333,11 +10893,11 @@
               </a:spcAft>
             </a:pPr>
             <a:r>
-              <a:rPr sz="1300" b="1" i="0">
+              <a:rPr sz="1300" b="0" i="0">
                 <a:solidFill>
                   <a:srgbClr val="2E3570"/>
                 </a:solidFill>
-                <a:latin typeface="Libre Caslon Display"/>
+                <a:latin typeface="Georgia"/>
               </a:rPr>
               <a:t>Tuesday, something came up</a:t>
             </a:r>
@@ -11379,7 +10939,7 @@
                 <a:solidFill>
                   <a:srgbClr val="5C6552"/>
                 </a:solidFill>
-                <a:latin typeface="Karla"/>
+                <a:latin typeface="Calibri"/>
               </a:rPr>
               <a:t>It was not your fault, and there was no space in the plan for it.</a:t>
             </a:r>
@@ -11509,7 +11069,7 @@
                 <a:solidFill>
                   <a:srgbClr val="FFFDF7"/>
                 </a:solidFill>
-                <a:latin typeface="Karla"/>
+                <a:latin typeface="Calibri"/>
               </a:rPr>
               <a:t>3</a:t>
             </a:r>
@@ -11547,11 +11107,11 @@
               </a:spcAft>
             </a:pPr>
             <a:r>
-              <a:rPr sz="1300" b="1" i="0">
+              <a:rPr sz="1300" b="0" i="0">
                 <a:solidFill>
                   <a:srgbClr val="2E3570"/>
                 </a:solidFill>
-                <a:latin typeface="Libre Caslon Display"/>
+                <a:latin typeface="Georgia"/>
               </a:rPr>
               <a:t>Thursday was a rescue</a:t>
             </a:r>
@@ -11593,7 +11153,7 @@
                 <a:solidFill>
                   <a:srgbClr val="5C6552"/>
                 </a:solidFill>
-                <a:latin typeface="Karla"/>
+                <a:latin typeface="Calibri"/>
               </a:rPr>
               <a:t>Everything that had moved was now on Thursday, which was already full.</a:t>
             </a:r>
@@ -11723,7 +11283,7 @@
                 <a:solidFill>
                   <a:srgbClr val="FFFDF7"/>
                 </a:solidFill>
-                <a:latin typeface="Karla"/>
+                <a:latin typeface="Calibri"/>
               </a:rPr>
               <a:t>4</a:t>
             </a:r>
@@ -11761,11 +11321,11 @@
               </a:spcAft>
             </a:pPr>
             <a:r>
-              <a:rPr sz="1300" b="1" i="0">
+              <a:rPr sz="1300" b="0" i="0">
                 <a:solidFill>
                   <a:srgbClr val="2E3570"/>
                 </a:solidFill>
-                <a:latin typeface="Libre Caslon Display"/>
+                <a:latin typeface="Georgia"/>
               </a:rPr>
               <a:t>Then nothing</a:t>
             </a:r>
@@ -11807,7 +11367,7 @@
                 <a:solidFill>
                   <a:srgbClr val="5C6552"/>
                 </a:solidFill>
-                <a:latin typeface="Karla"/>
+                <a:latin typeface="Calibri"/>
               </a:rPr>
               <a:t>The plan was two days behind, so it stopped being a plan.</a:t>
             </a:r>
@@ -11849,7 +11409,7 @@
                 <a:solidFill>
                   <a:srgbClr val="5C6552"/>
                 </a:solidFill>
-                <a:latin typeface="Karla"/>
+                <a:latin typeface="Calibri"/>
               </a:rPr>
               <a:t>The plan did not fail because you did. It failed because it was written for a week that does not exist.</a:t>
             </a:r>
@@ -11915,7 +11475,7 @@
                 <a:solidFill>
                   <a:srgbClr val="8B9179"/>
                 </a:solidFill>
-                <a:latin typeface="Karla"/>
+                <a:latin typeface="Calibri"/>
               </a:rPr>
               <a:t>The Pastoral Guide</a:t>
             </a:r>
@@ -11957,7 +11517,7 @@
                 <a:solidFill>
                   <a:srgbClr val="8B9179"/>
                 </a:solidFill>
-                <a:latin typeface="Karla"/>
+                <a:latin typeface="Calibri"/>
               </a:rPr>
               <a:t>4 / 17</a:t>
             </a:r>
@@ -12028,61 +11588,6 @@
       </p:sp>
       <p:sp>
         <p:nvSpPr>
-          <p:cNvPr id="3" name="Rounded Rectangle 2"/>
-          <p:cNvSpPr/>
-          <p:nvPr/>
-        </p:nvSpPr>
-        <p:spPr>
-          <a:xfrm>
-            <a:off x="685800" y="548640"/>
-            <a:ext cx="799619" cy="237744"/>
-          </a:xfrm>
-          <a:prstGeom prst="roundRect">
-            <a:avLst>
-              <a:gd name="adj" fmla="val 50000"/>
-            </a:avLst>
-          </a:prstGeom>
-          <a:solidFill>
-            <a:srgbClr val="EEEFF7"/>
-          </a:solidFill>
-          <a:ln>
-            <a:noFill/>
-          </a:ln>
-          <a:effectLst/>
-        </p:spPr>
-        <p:style>
-          <a:lnRef idx="1">
-            <a:schemeClr val="accent1"/>
-          </a:lnRef>
-          <a:fillRef idx="3">
-            <a:schemeClr val="accent1"/>
-          </a:fillRef>
-          <a:effectRef idx="2">
-            <a:schemeClr val="accent1"/>
-          </a:effectRef>
-          <a:fontRef idx="minor">
-            <a:schemeClr val="lt1"/>
-          </a:fontRef>
-        </p:style>
-        <p:txBody>
-          <a:bodyPr rtlCol="0" anchor="ctr" wrap="none" lIns="0" rIns="0" tIns="0" bIns="0"/>
-          <a:lstStyle/>
-          <a:p>
-            <a:pPr algn="ctr"/>
-            <a:r>
-              <a:rPr sz="950" b="1" spc="90">
-                <a:solidFill>
-                  <a:srgbClr val="2E3570"/>
-                </a:solidFill>
-                <a:latin typeface="Karla"/>
-              </a:rPr>
-              <a:t>TEACH</a:t>
-            </a:r>
-          </a:p>
-        </p:txBody>
-      </p:sp>
-      <p:sp>
-        <p:nvSpPr>
           <p:cNvPr id="4" name="TextBox 3"/>
           <p:cNvSpPr txBox="1"/>
           <p:nvPr/>
@@ -12112,11 +11617,11 @@
               </a:spcAft>
             </a:pPr>
             <a:r>
-              <a:rPr sz="3000" b="1" i="0">
+              <a:rPr sz="3000" b="0" i="0">
                 <a:solidFill>
                   <a:srgbClr val="2E3436"/>
                 </a:solidFill>
-                <a:latin typeface="Libre Caslon Display"/>
+                <a:latin typeface="Georgia"/>
               </a:rPr>
               <a:t>Two kinds of plan</a:t>
             </a:r>
@@ -12198,11 +11703,11 @@
               </a:spcAft>
             </a:pPr>
             <a:r>
-              <a:rPr sz="1350" b="1" i="0">
+              <a:rPr sz="1350" b="0" i="0">
                 <a:solidFill>
                   <a:srgbClr val="2E3570"/>
                 </a:solidFill>
-                <a:latin typeface="Libre Caslon Display"/>
+                <a:latin typeface="Georgia"/>
               </a:rPr>
               <a:t>A plan for a perfect week</a:t>
             </a:r>
@@ -12288,7 +11793,7 @@
                 <a:solidFill>
                   <a:srgbClr val="2E3436"/>
                 </a:solidFill>
-                <a:latin typeface="Karla"/>
+                <a:latin typeface="Calibri"/>
               </a:rPr>
               <a:t>Every evening is free.</a:t>
             </a:r>
@@ -12374,7 +11879,7 @@
                 <a:solidFill>
                   <a:srgbClr val="2E3436"/>
                 </a:solidFill>
-                <a:latin typeface="Karla"/>
+                <a:latin typeface="Calibri"/>
               </a:rPr>
               <a:t>Nobody needs you for anything.</a:t>
             </a:r>
@@ -12460,7 +11965,7 @@
                 <a:solidFill>
                   <a:srgbClr val="2E3436"/>
                 </a:solidFill>
-                <a:latin typeface="Karla"/>
+                <a:latin typeface="Calibri"/>
               </a:rPr>
               <a:t>You feel like it every night.</a:t>
             </a:r>
@@ -12546,7 +12051,7 @@
                 <a:solidFill>
                   <a:srgbClr val="2E3436"/>
                 </a:solidFill>
-                <a:latin typeface="Karla"/>
+                <a:latin typeface="Calibri"/>
               </a:rPr>
               <a:t>One missed session breaks it.</a:t>
             </a:r>
@@ -12628,11 +12133,11 @@
               </a:spcAft>
             </a:pPr>
             <a:r>
-              <a:rPr sz="1350" b="1" i="0">
+              <a:rPr sz="1350" b="0" i="0">
                 <a:solidFill>
                   <a:srgbClr val="2E3570"/>
                 </a:solidFill>
-                <a:latin typeface="Libre Caslon Display"/>
+                <a:latin typeface="Georgia"/>
               </a:rPr>
               <a:t>A plan for a real week</a:t>
             </a:r>
@@ -12718,7 +12223,7 @@
                 <a:solidFill>
                   <a:srgbClr val="2E3436"/>
                 </a:solidFill>
-                <a:latin typeface="Karla"/>
+                <a:latin typeface="Calibri"/>
               </a:rPr>
               <a:t>One evening is going to be lost.</a:t>
             </a:r>
@@ -12804,7 +12309,7 @@
                 <a:solidFill>
                   <a:srgbClr val="2E3436"/>
                 </a:solidFill>
-                <a:latin typeface="Karla"/>
+                <a:latin typeface="Calibri"/>
               </a:rPr>
               <a:t>Something will move.</a:t>
             </a:r>
@@ -12890,7 +12395,7 @@
                 <a:solidFill>
                   <a:srgbClr val="2E3436"/>
                 </a:solidFill>
-                <a:latin typeface="Karla"/>
+                <a:latin typeface="Calibri"/>
               </a:rPr>
               <a:t>Some sessions are twenty-five minutes.</a:t>
             </a:r>
@@ -12976,7 +12481,7 @@
                 <a:solidFill>
                   <a:srgbClr val="2E3436"/>
                 </a:solidFill>
-                <a:latin typeface="Karla"/>
+                <a:latin typeface="Calibri"/>
               </a:rPr>
               <a:t>There is a slot with nothing in it.</a:t>
             </a:r>
@@ -13018,7 +12523,7 @@
                 <a:solidFill>
                   <a:srgbClr val="5C6552"/>
                 </a:solidFill>
-                <a:latin typeface="Karla"/>
+                <a:latin typeface="Calibri"/>
               </a:rPr>
               <a:t>You are going to write the second one.</a:t>
             </a:r>
@@ -13084,7 +12589,7 @@
                 <a:solidFill>
                   <a:srgbClr val="8B9179"/>
                 </a:solidFill>
-                <a:latin typeface="Karla"/>
+                <a:latin typeface="Calibri"/>
               </a:rPr>
               <a:t>The Pastoral Guide</a:t>
             </a:r>
@@ -13126,7 +12631,7 @@
                 <a:solidFill>
                   <a:srgbClr val="8B9179"/>
                 </a:solidFill>
-                <a:latin typeface="Karla"/>
+                <a:latin typeface="Calibri"/>
               </a:rPr>
               <a:t>5 / 17</a:t>
             </a:r>
@@ -13197,61 +12702,6 @@
       </p:sp>
       <p:sp>
         <p:nvSpPr>
-          <p:cNvPr id="3" name="Rounded Rectangle 2"/>
-          <p:cNvSpPr/>
-          <p:nvPr/>
-        </p:nvSpPr>
-        <p:spPr>
-          <a:xfrm>
-            <a:off x="685800" y="548640"/>
-            <a:ext cx="799619" cy="237744"/>
-          </a:xfrm>
-          <a:prstGeom prst="roundRect">
-            <a:avLst>
-              <a:gd name="adj" fmla="val 50000"/>
-            </a:avLst>
-          </a:prstGeom>
-          <a:solidFill>
-            <a:srgbClr val="EEEFF7"/>
-          </a:solidFill>
-          <a:ln>
-            <a:noFill/>
-          </a:ln>
-          <a:effectLst/>
-        </p:spPr>
-        <p:style>
-          <a:lnRef idx="1">
-            <a:schemeClr val="accent1"/>
-          </a:lnRef>
-          <a:fillRef idx="3">
-            <a:schemeClr val="accent1"/>
-          </a:fillRef>
-          <a:effectRef idx="2">
-            <a:schemeClr val="accent1"/>
-          </a:effectRef>
-          <a:fontRef idx="minor">
-            <a:schemeClr val="lt1"/>
-          </a:fontRef>
-        </p:style>
-        <p:txBody>
-          <a:bodyPr rtlCol="0" anchor="ctr" wrap="none" lIns="0" rIns="0" tIns="0" bIns="0"/>
-          <a:lstStyle/>
-          <a:p>
-            <a:pPr algn="ctr"/>
-            <a:r>
-              <a:rPr sz="950" b="1" spc="90">
-                <a:solidFill>
-                  <a:srgbClr val="2E3570"/>
-                </a:solidFill>
-                <a:latin typeface="Karla"/>
-              </a:rPr>
-              <a:t>TEACH</a:t>
-            </a:r>
-          </a:p>
-        </p:txBody>
-      </p:sp>
-      <p:sp>
-        <p:nvSpPr>
           <p:cNvPr id="4" name="TextBox 3"/>
           <p:cNvSpPr txBox="1"/>
           <p:nvPr/>
@@ -13281,11 +12731,11 @@
               </a:spcAft>
             </a:pPr>
             <a:r>
-              <a:rPr sz="3000" b="1" i="0">
+              <a:rPr sz="3000" b="0" i="0">
                 <a:solidFill>
                   <a:srgbClr val="2E3436"/>
                 </a:solidFill>
-                <a:latin typeface="Libre Caslon Display"/>
+                <a:latin typeface="Georgia"/>
               </a:rPr>
               <a:t>Four rules that keep a plan alive</a:t>
             </a:r>
@@ -13435,11 +12885,11 @@
               </a:spcAft>
             </a:pPr>
             <a:r>
-              <a:rPr sz="1400" b="1" i="0">
+              <a:rPr sz="1400" b="0" i="0">
                 <a:solidFill>
                   <a:srgbClr val="2E3570"/>
                 </a:solidFill>
-                <a:latin typeface="Libre Caslon Display"/>
+                <a:latin typeface="Georgia"/>
               </a:rPr>
               <a:t>Small sessions</a:t>
             </a:r>
@@ -13481,7 +12931,7 @@
                 <a:solidFill>
                   <a:srgbClr val="5C6552"/>
                 </a:solidFill>
-                <a:latin typeface="Karla"/>
+                <a:latin typeface="Calibri"/>
               </a:rPr>
               <a:t>Twenty-five minutes, one thing. Small enough to do on a bad night.</a:t>
             </a:r>
@@ -13631,11 +13081,11 @@
               </a:spcAft>
             </a:pPr>
             <a:r>
-              <a:rPr sz="1400" b="1" i="0">
+              <a:rPr sz="1400" b="0" i="0">
                 <a:solidFill>
                   <a:srgbClr val="2E3570"/>
                 </a:solidFill>
-                <a:latin typeface="Libre Caslon Display"/>
+                <a:latin typeface="Georgia"/>
               </a:rPr>
               <a:t>Named, not vague</a:t>
             </a:r>
@@ -13677,7 +13127,7 @@
                 <a:solidFill>
                   <a:srgbClr val="5C6552"/>
                 </a:solidFill>
-                <a:latin typeface="Karla"/>
+                <a:latin typeface="Calibri"/>
               </a:rPr>
               <a:t>“Biology: cells, questions 1 to 10” is a session. “Revise biology” is not.</a:t>
             </a:r>
@@ -13827,11 +13277,11 @@
               </a:spcAft>
             </a:pPr>
             <a:r>
-              <a:rPr sz="1400" b="1" i="0">
+              <a:rPr sz="1400" b="0" i="0">
                 <a:solidFill>
                   <a:srgbClr val="2E3570"/>
                 </a:solidFill>
-                <a:latin typeface="Libre Caslon Display"/>
+                <a:latin typeface="Georgia"/>
               </a:rPr>
               <a:t>One spare slot</a:t>
             </a:r>
@@ -13873,7 +13323,7 @@
                 <a:solidFill>
                   <a:srgbClr val="5C6552"/>
                 </a:solidFill>
-                <a:latin typeface="Karla"/>
+                <a:latin typeface="Calibri"/>
               </a:rPr>
               <a:t>One evening with nothing in it, on purpose. Moved sessions go there.</a:t>
             </a:r>
@@ -14023,11 +13473,11 @@
               </a:spcAft>
             </a:pPr>
             <a:r>
-              <a:rPr sz="1400" b="1" i="0">
+              <a:rPr sz="1400" b="0" i="0">
                 <a:solidFill>
                   <a:srgbClr val="2E3570"/>
                 </a:solidFill>
-                <a:latin typeface="Libre Caslon Display"/>
+                <a:latin typeface="Georgia"/>
               </a:rPr>
               <a:t>Next week, not the term</a:t>
             </a:r>
@@ -14069,7 +13519,7 @@
                 <a:solidFill>
                   <a:srgbClr val="5C6552"/>
                 </a:solidFill>
-                <a:latin typeface="Karla"/>
+                <a:latin typeface="Calibri"/>
               </a:rPr>
               <a:t>Sunday evening, plan seven days. A term plan is stale by Wednesday.</a:t>
             </a:r>
@@ -14111,7 +13561,7 @@
                 <a:solidFill>
                   <a:srgbClr val="5C6552"/>
                 </a:solidFill>
-                <a:latin typeface="Karla"/>
+                <a:latin typeface="Calibri"/>
               </a:rPr>
               <a:t>Every repair you make later uses one of these four.</a:t>
             </a:r>
@@ -14177,7 +13627,7 @@
                 <a:solidFill>
                   <a:srgbClr val="8B9179"/>
                 </a:solidFill>
-                <a:latin typeface="Karla"/>
+                <a:latin typeface="Calibri"/>
               </a:rPr>
               <a:t>The Pastoral Guide</a:t>
             </a:r>
@@ -14219,7 +13669,7 @@
                 <a:solidFill>
                   <a:srgbClr val="8B9179"/>
                 </a:solidFill>
-                <a:latin typeface="Karla"/>
+                <a:latin typeface="Calibri"/>
               </a:rPr>
               <a:t>6 / 17</a:t>
             </a:r>
@@ -14290,61 +13740,6 @@
       </p:sp>
       <p:sp>
         <p:nvSpPr>
-          <p:cNvPr id="3" name="Rounded Rectangle 2"/>
-          <p:cNvSpPr/>
-          <p:nvPr/>
-        </p:nvSpPr>
-        <p:spPr>
-          <a:xfrm>
-            <a:off x="685800" y="548640"/>
-            <a:ext cx="834098" cy="237744"/>
-          </a:xfrm>
-          <a:prstGeom prst="roundRect">
-            <a:avLst>
-              <a:gd name="adj" fmla="val 50000"/>
-            </a:avLst>
-          </a:prstGeom>
-          <a:solidFill>
-            <a:srgbClr val="EEEFF7"/>
-          </a:solidFill>
-          <a:ln>
-            <a:noFill/>
-          </a:ln>
-          <a:effectLst/>
-        </p:spPr>
-        <p:style>
-          <a:lnRef idx="1">
-            <a:schemeClr val="accent1"/>
-          </a:lnRef>
-          <a:fillRef idx="3">
-            <a:schemeClr val="accent1"/>
-          </a:fillRef>
-          <a:effectRef idx="2">
-            <a:schemeClr val="accent1"/>
-          </a:effectRef>
-          <a:fontRef idx="minor">
-            <a:schemeClr val="lt1"/>
-          </a:fontRef>
-        </p:style>
-        <p:txBody>
-          <a:bodyPr rtlCol="0" anchor="ctr" wrap="none" lIns="0" rIns="0" tIns="0" bIns="0"/>
-          <a:lstStyle/>
-          <a:p>
-            <a:pPr algn="ctr"/>
-            <a:r>
-              <a:rPr sz="950" b="1" spc="90">
-                <a:solidFill>
-                  <a:srgbClr val="2E3570"/>
-                </a:solidFill>
-                <a:latin typeface="Karla"/>
-              </a:rPr>
-              <a:t>MODEL</a:t>
-            </a:r>
-          </a:p>
-        </p:txBody>
-      </p:sp>
-      <p:sp>
-        <p:nvSpPr>
           <p:cNvPr id="4" name="TextBox 3"/>
           <p:cNvSpPr txBox="1"/>
           <p:nvPr/>
@@ -14374,11 +13769,11 @@
               </a:spcAft>
             </a:pPr>
             <a:r>
-              <a:rPr sz="3000" b="1" i="0">
+              <a:rPr sz="3000" b="0" i="0">
                 <a:solidFill>
                   <a:srgbClr val="2E3436"/>
                 </a:solidFill>
-                <a:latin typeface="Libre Caslon Display"/>
+                <a:latin typeface="Georgia"/>
               </a:rPr>
               <a:t>One Monday, twice</a:t>
             </a:r>
@@ -14420,7 +13815,7 @@
                 <a:solidFill>
                   <a:srgbClr val="5C6552"/>
                 </a:solidFill>
-                <a:latin typeface="Karla"/>
+                <a:latin typeface="Calibri"/>
               </a:rPr>
               <a:t>The same evening, planned two ways.</a:t>
             </a:r>
@@ -14550,7 +13945,7 @@
                 <a:solidFill>
                   <a:srgbClr val="FFFDF7"/>
                 </a:solidFill>
-                <a:latin typeface="Karla"/>
+                <a:latin typeface="Calibri"/>
               </a:rPr>
               <a:t>1</a:t>
             </a:r>
@@ -14588,11 +13983,11 @@
               </a:spcAft>
             </a:pPr>
             <a:r>
-              <a:rPr sz="1300" b="1" i="0">
+              <a:rPr sz="1300" b="0" i="0">
                 <a:solidFill>
                   <a:srgbClr val="2E3570"/>
                 </a:solidFill>
-                <a:latin typeface="Libre Caslon Display"/>
+                <a:latin typeface="Georgia"/>
               </a:rPr>
               <a:t>Revise maths, 6 until 9</a:t>
             </a:r>
@@ -14634,7 +14029,7 @@
                 <a:solidFill>
                   <a:srgbClr val="5C6552"/>
                 </a:solidFill>
-                <a:latin typeface="Karla"/>
+                <a:latin typeface="Calibri"/>
               </a:rPr>
               <a:t>Three hours, no detail. By half past six it is something else.</a:t>
             </a:r>
@@ -14764,7 +14159,7 @@
                 <a:solidFill>
                   <a:srgbClr val="FFFDF7"/>
                 </a:solidFill>
-                <a:latin typeface="Karla"/>
+                <a:latin typeface="Calibri"/>
               </a:rPr>
               <a:t>2</a:t>
             </a:r>
@@ -14802,11 +14197,11 @@
               </a:spcAft>
             </a:pPr>
             <a:r>
-              <a:rPr sz="1300" b="1" i="0">
+              <a:rPr sz="1300" b="0" i="0">
                 <a:solidFill>
                   <a:srgbClr val="2E3570"/>
                 </a:solidFill>
-                <a:latin typeface="Libre Caslon Display"/>
+                <a:latin typeface="Georgia"/>
               </a:rPr>
               <a:t>Maths: quadratics, the ten questions on page 42, 6 until 6.25</a:t>
             </a:r>
@@ -14848,7 +14243,7 @@
                 <a:solidFill>
                   <a:srgbClr val="5C6552"/>
                 </a:solidFill>
-                <a:latin typeface="Karla"/>
+                <a:latin typeface="Calibri"/>
               </a:rPr>
               <a:t>Twenty-five minutes with a finish line. It gets done, and it gets ticked.</a:t>
             </a:r>
@@ -14978,7 +14373,7 @@
                 <a:solidFill>
                   <a:srgbClr val="FFFDF7"/>
                 </a:solidFill>
-                <a:latin typeface="Karla"/>
+                <a:latin typeface="Calibri"/>
               </a:rPr>
               <a:t>3</a:t>
             </a:r>
@@ -15016,11 +14411,11 @@
               </a:spcAft>
             </a:pPr>
             <a:r>
-              <a:rPr sz="1300" b="1" i="0">
+              <a:rPr sz="1300" b="0" i="0">
                 <a:solidFill>
                   <a:srgbClr val="2E3570"/>
                 </a:solidFill>
-                <a:latin typeface="Libre Caslon Display"/>
+                <a:latin typeface="Georgia"/>
               </a:rPr>
               <a:t>Then a second one, if the evening allows</a:t>
             </a:r>
@@ -15062,7 +14457,7 @@
                 <a:solidFill>
                   <a:srgbClr val="5C6552"/>
                 </a:solidFill>
-                <a:latin typeface="Karla"/>
+                <a:latin typeface="Calibri"/>
               </a:rPr>
               <a:t>Chemistry: bonding, redo last week’s test, 7 until 7.25. If it does not, one is enough.</a:t>
             </a:r>
@@ -15104,7 +14499,7 @@
                 <a:solidFill>
                   <a:srgbClr val="5C6552"/>
                 </a:solidFill>
-                <a:latin typeface="Karla"/>
+                <a:latin typeface="Calibri"/>
               </a:rPr>
               <a:t>Two short named sessions on a normal evening beat three hours on paper.</a:t>
             </a:r>
@@ -15170,7 +14565,7 @@
                 <a:solidFill>
                   <a:srgbClr val="8B9179"/>
                 </a:solidFill>
-                <a:latin typeface="Karla"/>
+                <a:latin typeface="Calibri"/>
               </a:rPr>
               <a:t>The Pastoral Guide</a:t>
             </a:r>
@@ -15212,7 +14607,7 @@
                 <a:solidFill>
                   <a:srgbClr val="8B9179"/>
                 </a:solidFill>
-                <a:latin typeface="Karla"/>
+                <a:latin typeface="Calibri"/>
               </a:rPr>
               <a:t>7 / 17</a:t>
             </a:r>
@@ -15283,61 +14678,6 @@
       </p:sp>
       <p:sp>
         <p:nvSpPr>
-          <p:cNvPr id="3" name="Rounded Rectangle 2"/>
-          <p:cNvSpPr/>
-          <p:nvPr/>
-        </p:nvSpPr>
-        <p:spPr>
-          <a:xfrm>
-            <a:off x="685800" y="548640"/>
-            <a:ext cx="1177620" cy="237744"/>
-          </a:xfrm>
-          <a:prstGeom prst="roundRect">
-            <a:avLst>
-              <a:gd name="adj" fmla="val 50000"/>
-            </a:avLst>
-          </a:prstGeom>
-          <a:solidFill>
-            <a:srgbClr val="EEEFF7"/>
-          </a:solidFill>
-          <a:ln>
-            <a:noFill/>
-          </a:ln>
-          <a:effectLst/>
-        </p:spPr>
-        <p:style>
-          <a:lnRef idx="1">
-            <a:schemeClr val="accent1"/>
-          </a:lnRef>
-          <a:fillRef idx="3">
-            <a:schemeClr val="accent1"/>
-          </a:fillRef>
-          <a:effectRef idx="2">
-            <a:schemeClr val="accent1"/>
-          </a:effectRef>
-          <a:fontRef idx="minor">
-            <a:schemeClr val="lt1"/>
-          </a:fontRef>
-        </p:style>
-        <p:txBody>
-          <a:bodyPr rtlCol="0" anchor="ctr" wrap="none" lIns="0" rIns="0" tIns="0" bIns="0"/>
-          <a:lstStyle/>
-          <a:p>
-            <a:pPr algn="ctr"/>
-            <a:r>
-              <a:rPr sz="950" b="1" spc="90">
-                <a:solidFill>
-                  <a:srgbClr val="2E3570"/>
-                </a:solidFill>
-                <a:latin typeface="Karla"/>
-              </a:rPr>
-              <a:t>YOUR TURN</a:t>
-            </a:r>
-          </a:p>
-        </p:txBody>
-      </p:sp>
-      <p:sp>
-        <p:nvSpPr>
           <p:cNvPr id="4" name="TextBox 3"/>
           <p:cNvSpPr txBox="1"/>
           <p:nvPr/>
@@ -15367,11 +14707,11 @@
               </a:spcAft>
             </a:pPr>
             <a:r>
-              <a:rPr sz="3000" b="1" i="0">
+              <a:rPr sz="3000" b="0" i="0">
                 <a:solidFill>
                   <a:srgbClr val="2E3436"/>
                 </a:solidFill>
-                <a:latin typeface="Libre Caslon Display"/>
+                <a:latin typeface="Georgia"/>
               </a:rPr>
               <a:t>Plan the seven days ahead</a:t>
             </a:r>
@@ -15413,7 +14753,7 @@
                 <a:solidFill>
                   <a:srgbClr val="5C6552"/>
                 </a:solidFill>
-                <a:latin typeface="Karla"/>
+                <a:latin typeface="Calibri"/>
               </a:rPr>
               <a:t>On the sheet, in pencil. This is a real week: the one that starts tomorrow.</a:t>
             </a:r>
@@ -15543,7 +14883,7 @@
                 <a:solidFill>
                   <a:srgbClr val="FFFDF7"/>
                 </a:solidFill>
-                <a:latin typeface="Karla"/>
+                <a:latin typeface="Calibri"/>
               </a:rPr>
               <a:t>1</a:t>
             </a:r>
@@ -15581,11 +14921,11 @@
               </a:spcAft>
             </a:pPr>
             <a:r>
-              <a:rPr sz="1300" b="1" i="0">
+              <a:rPr sz="1300" b="0" i="0">
                 <a:solidFill>
                   <a:srgbClr val="2E3570"/>
                 </a:solidFill>
-                <a:latin typeface="Libre Caslon Display"/>
+                <a:latin typeface="Georgia"/>
               </a:rPr>
               <a:t>Up to two sessions a day, each one named</a:t>
             </a:r>
@@ -15627,7 +14967,7 @@
                 <a:solidFill>
                   <a:srgbClr val="5C6552"/>
                 </a:solidFill>
-                <a:latin typeface="Karla"/>
+                <a:latin typeface="Calibri"/>
               </a:rPr>
               <a:t>Subject, topic, and what you will actually do. A page number is a good sign.</a:t>
             </a:r>
@@ -15757,7 +15097,7 @@
                 <a:solidFill>
                   <a:srgbClr val="FFFDF7"/>
                 </a:solidFill>
-                <a:latin typeface="Karla"/>
+                <a:latin typeface="Calibri"/>
               </a:rPr>
               <a:t>2</a:t>
             </a:r>
@@ -15795,11 +15135,11 @@
               </a:spcAft>
             </a:pPr>
             <a:r>
-              <a:rPr sz="1300" b="1" i="0">
+              <a:rPr sz="1300" b="0" i="0">
                 <a:solidFill>
                   <a:srgbClr val="2E3570"/>
                 </a:solidFill>
-                <a:latin typeface="Libre Caslon Display"/>
+                <a:latin typeface="Georgia"/>
               </a:rPr>
               <a:t>Leave one slot empty</a:t>
             </a:r>
@@ -15841,7 +15181,7 @@
                 <a:solidFill>
                   <a:srgbClr val="5C6552"/>
                 </a:solidFill>
-                <a:latin typeface="Karla"/>
+                <a:latin typeface="Calibri"/>
               </a:rPr>
               <a:t>Cross it through and write SPARE. It is not a day off; it is where things go when they move.</a:t>
             </a:r>
@@ -15971,7 +15311,7 @@
                 <a:solidFill>
                   <a:srgbClr val="FFFDF7"/>
                 </a:solidFill>
-                <a:latin typeface="Karla"/>
+                <a:latin typeface="Calibri"/>
               </a:rPr>
               <a:t>3</a:t>
             </a:r>
@@ -16009,11 +15349,11 @@
               </a:spcAft>
             </a:pPr>
             <a:r>
-              <a:rPr sz="1300" b="1" i="0">
+              <a:rPr sz="1300" b="0" i="0">
                 <a:solidFill>
                   <a:srgbClr val="2E3570"/>
                 </a:solidFill>
-                <a:latin typeface="Libre Caslon Display"/>
+                <a:latin typeface="Georgia"/>
               </a:rPr>
               <a:t>Put in the things that are already fixed</a:t>
             </a:r>
@@ -16055,7 +15395,7 @@
                 <a:solidFill>
                   <a:srgbClr val="5C6552"/>
                 </a:solidFill>
-                <a:latin typeface="Karla"/>
+                <a:latin typeface="Calibri"/>
               </a:rPr>
               <a:t>Work shifts, training, family things, a birthday. Plan around them, not through them.</a:t>
             </a:r>
@@ -16097,7 +15437,7 @@
                 <a:solidFill>
                   <a:srgbClr val="5C6552"/>
                 </a:solidFill>
-                <a:latin typeface="Karla"/>
+                <a:latin typeface="Calibri"/>
               </a:rPr>
               <a:t>Six minutes. If you finish early, make a session smaller.</a:t>
             </a:r>
@@ -16163,7 +15503,7 @@
                 <a:solidFill>
                   <a:srgbClr val="8B9179"/>
                 </a:solidFill>
-                <a:latin typeface="Karla"/>
+                <a:latin typeface="Calibri"/>
               </a:rPr>
               <a:t>The Pastoral Guide</a:t>
             </a:r>
@@ -16205,7 +15545,7 @@
                 <a:solidFill>
                   <a:srgbClr val="8B9179"/>
                 </a:solidFill>
-                <a:latin typeface="Karla"/>
+                <a:latin typeface="Calibri"/>
               </a:rPr>
               <a:t>8 / 17</a:t>
             </a:r>
@@ -16276,18 +15616,102 @@
       </p:sp>
       <p:sp>
         <p:nvSpPr>
-          <p:cNvPr id="3" name="Rounded Rectangle 2"/>
+          <p:cNvPr id="4" name="TextBox 3"/>
+          <p:cNvSpPr txBox="1"/>
+          <p:nvPr/>
+        </p:nvSpPr>
+        <p:spPr>
+          <a:xfrm>
+            <a:off x="685800" y="896112"/>
+            <a:ext cx="7772400" cy="566928"/>
+          </a:xfrm>
+          <a:prstGeom prst="rect">
+            <a:avLst/>
+          </a:prstGeom>
+          <a:noFill/>
+        </p:spPr>
+        <p:txBody>
+          <a:bodyPr wrap="square" anchor="t" lIns="0" rIns="0" tIns="0" bIns="0">
+            <a:spAutoFit/>
+          </a:bodyPr>
+          <a:lstStyle/>
+          <a:p>
+            <a:pPr algn="l">
+              <a:lnSpc>
+                <a:spcPct val="105000"/>
+              </a:lnSpc>
+              <a:spcAft>
+                <a:spcPts val="0"/>
+              </a:spcAft>
+            </a:pPr>
+            <a:r>
+              <a:rPr sz="3000" b="0" i="0">
+                <a:solidFill>
+                  <a:srgbClr val="FFFDF7"/>
+                </a:solidFill>
+                <a:latin typeface="Georgia"/>
+              </a:rPr>
+              <a:t>Tuesday, late</a:t>
+            </a:r>
+          </a:p>
+        </p:txBody>
+      </p:sp>
+      <p:sp>
+        <p:nvSpPr>
+          <p:cNvPr id="5" name="TextBox 4"/>
+          <p:cNvSpPr txBox="1"/>
+          <p:nvPr/>
+        </p:nvSpPr>
+        <p:spPr>
+          <a:xfrm>
+            <a:off x="685800" y="1645920"/>
+            <a:ext cx="7772400" cy="1097280"/>
+          </a:xfrm>
+          <a:prstGeom prst="rect">
+            <a:avLst/>
+          </a:prstGeom>
+          <a:noFill/>
+        </p:spPr>
+        <p:txBody>
+          <a:bodyPr wrap="square" anchor="t" lIns="0" rIns="0" tIns="0" bIns="0">
+            <a:spAutoFit/>
+          </a:bodyPr>
+          <a:lstStyle/>
+          <a:p>
+            <a:pPr algn="l">
+              <a:lnSpc>
+                <a:spcPct val="135000"/>
+              </a:lnSpc>
+              <a:spcAft>
+                <a:spcPts val="0"/>
+              </a:spcAft>
+            </a:pPr>
+            <a:r>
+              <a:rPr sz="1600" b="0" i="0">
+                <a:solidFill>
+                  <a:srgbClr val="FFFDF7"/>
+                </a:solidFill>
+                <a:latin typeface="Calibri"/>
+              </a:rPr>
+              <a:t>You were going to do the maths session after tea. Instead something happened at home that was nobody’s fault, and you were up until one in the morning. This morning you slept through the alarm and missed the bus.</a:t>
+            </a:r>
+          </a:p>
+        </p:txBody>
+      </p:sp>
+      <p:sp>
+        <p:nvSpPr>
+          <p:cNvPr id="6" name="Rounded Rectangle 5"/>
           <p:cNvSpPr/>
           <p:nvPr/>
         </p:nvSpPr>
         <p:spPr>
           <a:xfrm>
-            <a:off x="685800" y="548640"/>
-            <a:ext cx="1095269" cy="237744"/>
+            <a:off x="685800" y="2944368"/>
+            <a:ext cx="7772400" cy="658368"/>
           </a:xfrm>
           <a:prstGeom prst="roundRect">
             <a:avLst>
-              <a:gd name="adj" fmla="val 50000"/>
+              <a:gd name="adj" fmla="val 8000"/>
             </a:avLst>
           </a:prstGeom>
           <a:solidFill>
@@ -16313,145 +15737,6 @@
           </a:fontRef>
         </p:style>
         <p:txBody>
-          <a:bodyPr rtlCol="0" anchor="ctr" wrap="none" lIns="0" rIns="0" tIns="0" bIns="0"/>
-          <a:lstStyle/>
-          <a:p>
-            <a:pPr algn="ctr"/>
-            <a:r>
-              <a:rPr sz="950" b="1" spc="90">
-                <a:solidFill>
-                  <a:srgbClr val="2E3570"/>
-                </a:solidFill>
-                <a:latin typeface="Karla"/>
-              </a:rPr>
-              <a:t>IT BREAKS</a:t>
-            </a:r>
-          </a:p>
-        </p:txBody>
-      </p:sp>
-      <p:sp>
-        <p:nvSpPr>
-          <p:cNvPr id="4" name="TextBox 3"/>
-          <p:cNvSpPr txBox="1"/>
-          <p:nvPr/>
-        </p:nvSpPr>
-        <p:spPr>
-          <a:xfrm>
-            <a:off x="685800" y="896112"/>
-            <a:ext cx="7772400" cy="566928"/>
-          </a:xfrm>
-          <a:prstGeom prst="rect">
-            <a:avLst/>
-          </a:prstGeom>
-          <a:noFill/>
-        </p:spPr>
-        <p:txBody>
-          <a:bodyPr wrap="square" anchor="t" lIns="0" rIns="0" tIns="0" bIns="0">
-            <a:spAutoFit/>
-          </a:bodyPr>
-          <a:lstStyle/>
-          <a:p>
-            <a:pPr algn="l">
-              <a:lnSpc>
-                <a:spcPct val="105000"/>
-              </a:lnSpc>
-              <a:spcAft>
-                <a:spcPts val="0"/>
-              </a:spcAft>
-            </a:pPr>
-            <a:r>
-              <a:rPr sz="3000" b="1" i="0">
-                <a:solidFill>
-                  <a:srgbClr val="FFFDF7"/>
-                </a:solidFill>
-                <a:latin typeface="Libre Caslon Display"/>
-              </a:rPr>
-              <a:t>Tuesday, late</a:t>
-            </a:r>
-          </a:p>
-        </p:txBody>
-      </p:sp>
-      <p:sp>
-        <p:nvSpPr>
-          <p:cNvPr id="5" name="TextBox 4"/>
-          <p:cNvSpPr txBox="1"/>
-          <p:nvPr/>
-        </p:nvSpPr>
-        <p:spPr>
-          <a:xfrm>
-            <a:off x="685800" y="1645920"/>
-            <a:ext cx="7772400" cy="1097280"/>
-          </a:xfrm>
-          <a:prstGeom prst="rect">
-            <a:avLst/>
-          </a:prstGeom>
-          <a:noFill/>
-        </p:spPr>
-        <p:txBody>
-          <a:bodyPr wrap="square" anchor="t" lIns="0" rIns="0" tIns="0" bIns="0">
-            <a:spAutoFit/>
-          </a:bodyPr>
-          <a:lstStyle/>
-          <a:p>
-            <a:pPr algn="l">
-              <a:lnSpc>
-                <a:spcPct val="135000"/>
-              </a:lnSpc>
-              <a:spcAft>
-                <a:spcPts val="0"/>
-              </a:spcAft>
-            </a:pPr>
-            <a:r>
-              <a:rPr sz="1600" b="0" i="0">
-                <a:solidFill>
-                  <a:srgbClr val="FFFDF7"/>
-                </a:solidFill>
-                <a:latin typeface="Karla"/>
-              </a:rPr>
-              <a:t>You were going to do the maths session after tea. Instead something happened at home that was nobody’s fault, and you were up until one in the morning. This morning you slept through the alarm and missed the bus.</a:t>
-            </a:r>
-          </a:p>
-        </p:txBody>
-      </p:sp>
-      <p:sp>
-        <p:nvSpPr>
-          <p:cNvPr id="6" name="Rounded Rectangle 5"/>
-          <p:cNvSpPr/>
-          <p:nvPr/>
-        </p:nvSpPr>
-        <p:spPr>
-          <a:xfrm>
-            <a:off x="685800" y="2944368"/>
-            <a:ext cx="7772400" cy="658368"/>
-          </a:xfrm>
-          <a:prstGeom prst="roundRect">
-            <a:avLst>
-              <a:gd name="adj" fmla="val 8000"/>
-            </a:avLst>
-          </a:prstGeom>
-          <a:solidFill>
-            <a:srgbClr val="C9CCE6"/>
-          </a:solidFill>
-          <a:ln>
-            <a:noFill/>
-          </a:ln>
-          <a:effectLst/>
-        </p:spPr>
-        <p:style>
-          <a:lnRef idx="1">
-            <a:schemeClr val="accent1"/>
-          </a:lnRef>
-          <a:fillRef idx="3">
-            <a:schemeClr val="accent1"/>
-          </a:fillRef>
-          <a:effectRef idx="2">
-            <a:schemeClr val="accent1"/>
-          </a:effectRef>
-          <a:fontRef idx="minor">
-            <a:schemeClr val="lt1"/>
-          </a:fontRef>
-        </p:style>
-        <p:txBody>
           <a:bodyPr rtlCol="0" anchor="ctr"/>
           <a:lstStyle/>
           <a:p>
@@ -16494,7 +15779,7 @@
                 <a:solidFill>
                   <a:srgbClr val="2E3570"/>
                 </a:solidFill>
-                <a:latin typeface="Karla"/>
+                <a:latin typeface="Calibri"/>
               </a:rPr>
               <a:t>Tuesday’s sessions did not happen. Repair the plan: where do they go, and what gets smaller?</a:t>
             </a:r>
@@ -16536,7 +15821,7 @@
                 <a:solidFill>
                   <a:srgbClr val="C9CCE6"/>
                 </a:solidFill>
-                <a:latin typeface="Karla"/>
+                <a:latin typeface="Calibri"/>
               </a:rPr>
               <a:t>Two minutes, on the sheet. Use the spare slot or shrink something; do not add a third session to Wednesday.</a:t>
             </a:r>
@@ -16602,7 +15887,7 @@
                 <a:solidFill>
                   <a:srgbClr val="C9CCE6"/>
                 </a:solidFill>
-                <a:latin typeface="Karla"/>
+                <a:latin typeface="Calibri"/>
               </a:rPr>
               <a:t>The Pastoral Guide</a:t>
             </a:r>
@@ -16644,7 +15929,7 @@
                 <a:solidFill>
                   <a:srgbClr val="C9CCE6"/>
                 </a:solidFill>
-                <a:latin typeface="Karla"/>
+                <a:latin typeface="Calibri"/>
               </a:rPr>
               <a:t>9 / 17</a:t>
             </a:r>

--- a/tutor-time/revision-that-survives-the-week/downloads/Revision_That_Survives_the_Week.pptx
+++ b/tutor-time/revision-that-survives-the-week/downloads/Revision_That_Survives_the_Week.pptx
@@ -3307,7 +3307,7 @@
                 </a:solidFill>
                 <a:latin typeface="Calibri"/>
               </a:rPr>
-              <a:t>A plan is only as good as the week it meets.</a:t>
+              <a:t>A revision plan that still works when the week goes wrong.</a:t>
             </a:r>
           </a:p>
         </p:txBody>
